--- a/126/OPSAWG/draft-netana-opsawg-ipfix-gpon-gem-03.pptx
+++ b/126/OPSAWG/draft-netana-opsawg-ipfix-gpon-gem-03.pptx
@@ -5,17 +5,14 @@
     <p:sldMasterId id="2147483648" r:id="rId1"/>
   </p:sldMasterIdLst>
   <p:notesMasterIdLst>
-    <p:notesMasterId r:id="rId10"/>
+    <p:notesMasterId r:id="rId7"/>
   </p:notesMasterIdLst>
   <p:sldIdLst>
     <p:sldId id="1041" r:id="rId2"/>
-    <p:sldId id="1053" r:id="rId3"/>
-    <p:sldId id="1058" r:id="rId4"/>
-    <p:sldId id="1060" r:id="rId5"/>
-    <p:sldId id="1055" r:id="rId6"/>
-    <p:sldId id="1059" r:id="rId7"/>
-    <p:sldId id="1054" r:id="rId8"/>
-    <p:sldId id="1057" r:id="rId9"/>
+    <p:sldId id="1058" r:id="rId3"/>
+    <p:sldId id="1060" r:id="rId4"/>
+    <p:sldId id="1055" r:id="rId5"/>
+    <p:sldId id="1057" r:id="rId6"/>
   </p:sldIdLst>
   <p:sldSz cx="12192000" cy="6858000"/>
   <p:notesSz cx="6858000" cy="9144000"/>
@@ -259,25 +256,39 @@
   </pc:docChgLst>
   <pc:docChgLst>
     <pc:chgData name="Graf Thomas, SCS-INI-NET-VNC-E2E" userId="487bc3e3-9ce7-4cdd-b7b4-8899ea88d289" providerId="ADAL" clId="{ADEEF08A-D719-4B50-A383-4105EDA2C206}"/>
-    <pc:docChg chg="undo custSel addSld modSld sldOrd">
-      <pc:chgData name="Graf Thomas, SCS-INI-NET-VNC-E2E" userId="487bc3e3-9ce7-4cdd-b7b4-8899ea88d289" providerId="ADAL" clId="{ADEEF08A-D719-4B50-A383-4105EDA2C206}" dt="2026-07-14T14:11:46.358" v="556" actId="20577"/>
+    <pc:docChg chg="undo custSel addSld delSld modSld sldOrd">
+      <pc:chgData name="Graf Thomas, SCS-INI-NET-VNC-E2E" userId="487bc3e3-9ce7-4cdd-b7b4-8899ea88d289" providerId="ADAL" clId="{ADEEF08A-D719-4B50-A383-4105EDA2C206}" dt="2026-07-15T04:16:11.879" v="560" actId="20577"/>
       <pc:docMkLst>
         <pc:docMk/>
       </pc:docMkLst>
       <pc:sldChg chg="modSp mod">
-        <pc:chgData name="Graf Thomas, SCS-INI-NET-VNC-E2E" userId="487bc3e3-9ce7-4cdd-b7b4-8899ea88d289" providerId="ADAL" clId="{ADEEF08A-D719-4B50-A383-4105EDA2C206}" dt="2026-07-14T13:55:18.764" v="2" actId="20577"/>
+        <pc:chgData name="Graf Thomas, SCS-INI-NET-VNC-E2E" userId="487bc3e3-9ce7-4cdd-b7b4-8899ea88d289" providerId="ADAL" clId="{ADEEF08A-D719-4B50-A383-4105EDA2C206}" dt="2026-07-15T04:15:48.909" v="559" actId="20577"/>
         <pc:sldMkLst>
           <pc:docMk/>
           <pc:sldMk cId="3578665336" sldId="1041"/>
         </pc:sldMkLst>
         <pc:spChg chg="mod">
-          <ac:chgData name="Graf Thomas, SCS-INI-NET-VNC-E2E" userId="487bc3e3-9ce7-4cdd-b7b4-8899ea88d289" providerId="ADAL" clId="{ADEEF08A-D719-4B50-A383-4105EDA2C206}" dt="2026-07-14T13:55:18.764" v="2" actId="20577"/>
+          <ac:chgData name="Graf Thomas, SCS-INI-NET-VNC-E2E" userId="487bc3e3-9ce7-4cdd-b7b4-8899ea88d289" providerId="ADAL" clId="{ADEEF08A-D719-4B50-A383-4105EDA2C206}" dt="2026-07-15T04:15:48.909" v="559" actId="20577"/>
           <ac:spMkLst>
             <pc:docMk/>
             <pc:sldMk cId="3578665336" sldId="1041"/>
             <ac:spMk id="7" creationId="{5317E9BA-6AEC-4D14-B133-97378590FE3C}"/>
           </ac:spMkLst>
         </pc:spChg>
+      </pc:sldChg>
+      <pc:sldChg chg="del">
+        <pc:chgData name="Graf Thomas, SCS-INI-NET-VNC-E2E" userId="487bc3e3-9ce7-4cdd-b7b4-8899ea88d289" providerId="ADAL" clId="{ADEEF08A-D719-4B50-A383-4105EDA2C206}" dt="2026-07-15T04:15:38.204" v="558" actId="47"/>
+        <pc:sldMkLst>
+          <pc:docMk/>
+          <pc:sldMk cId="728278235" sldId="1053"/>
+        </pc:sldMkLst>
+      </pc:sldChg>
+      <pc:sldChg chg="del">
+        <pc:chgData name="Graf Thomas, SCS-INI-NET-VNC-E2E" userId="487bc3e3-9ce7-4cdd-b7b4-8899ea88d289" providerId="ADAL" clId="{ADEEF08A-D719-4B50-A383-4105EDA2C206}" dt="2026-07-15T04:15:35.598" v="557" actId="47"/>
+        <pc:sldMkLst>
+          <pc:docMk/>
+          <pc:sldMk cId="3255145719" sldId="1054"/>
+        </pc:sldMkLst>
       </pc:sldChg>
       <pc:sldChg chg="addSp delSp modSp mod">
         <pc:chgData name="Graf Thomas, SCS-INI-NET-VNC-E2E" userId="487bc3e3-9ce7-4cdd-b7b4-8899ea88d289" providerId="ADAL" clId="{ADEEF08A-D719-4B50-A383-4105EDA2C206}" dt="2026-07-14T14:07:01.787" v="215" actId="1076"/>
@@ -311,7 +322,7 @@
         </pc:picChg>
       </pc:sldChg>
       <pc:sldChg chg="modSp mod">
-        <pc:chgData name="Graf Thomas, SCS-INI-NET-VNC-E2E" userId="487bc3e3-9ce7-4cdd-b7b4-8899ea88d289" providerId="ADAL" clId="{ADEEF08A-D719-4B50-A383-4105EDA2C206}" dt="2026-07-14T14:11:46.358" v="556" actId="20577"/>
+        <pc:chgData name="Graf Thomas, SCS-INI-NET-VNC-E2E" userId="487bc3e3-9ce7-4cdd-b7b4-8899ea88d289" providerId="ADAL" clId="{ADEEF08A-D719-4B50-A383-4105EDA2C206}" dt="2026-07-15T04:16:11.879" v="560" actId="20577"/>
         <pc:sldMkLst>
           <pc:docMk/>
           <pc:sldMk cId="696618838" sldId="1057"/>
@@ -325,7 +336,7 @@
           </ac:spMkLst>
         </pc:spChg>
         <pc:spChg chg="mod">
-          <ac:chgData name="Graf Thomas, SCS-INI-NET-VNC-E2E" userId="487bc3e3-9ce7-4cdd-b7b4-8899ea88d289" providerId="ADAL" clId="{ADEEF08A-D719-4B50-A383-4105EDA2C206}" dt="2026-07-14T14:11:22.552" v="550" actId="20577"/>
+          <ac:chgData name="Graf Thomas, SCS-INI-NET-VNC-E2E" userId="487bc3e3-9ce7-4cdd-b7b4-8899ea88d289" providerId="ADAL" clId="{ADEEF08A-D719-4B50-A383-4105EDA2C206}" dt="2026-07-15T04:16:11.879" v="560" actId="20577"/>
           <ac:spMkLst>
             <pc:docMk/>
             <pc:sldMk cId="696618838" sldId="1057"/>
@@ -356,8 +367,8 @@
           </ac:spMkLst>
         </pc:spChg>
       </pc:sldChg>
-      <pc:sldChg chg="ord">
-        <pc:chgData name="Graf Thomas, SCS-INI-NET-VNC-E2E" userId="487bc3e3-9ce7-4cdd-b7b4-8899ea88d289" providerId="ADAL" clId="{ADEEF08A-D719-4B50-A383-4105EDA2C206}" dt="2026-07-14T14:02:51.196" v="42" actId="20578"/>
+      <pc:sldChg chg="del ord">
+        <pc:chgData name="Graf Thomas, SCS-INI-NET-VNC-E2E" userId="487bc3e3-9ce7-4cdd-b7b4-8899ea88d289" providerId="ADAL" clId="{ADEEF08A-D719-4B50-A383-4105EDA2C206}" dt="2026-07-15T04:15:35.598" v="557" actId="47"/>
         <pc:sldMkLst>
           <pc:docMk/>
           <pc:sldMk cId="3900353875" sldId="1059"/>
@@ -4565,7 +4576,7 @@
               <a:rPr lang="de-CH" sz="3800" dirty="0">
                 <a:latin typeface="+mj-lt"/>
               </a:rPr>
-              <a:t>14. </a:t>
+              <a:t>15. </a:t>
             </a:r>
             <a:r>
               <a:rPr lang="de-CH" sz="3800" dirty="0" err="1">
@@ -4620,300 +4631,6 @@
       </p:grpSpPr>
       <p:pic>
         <p:nvPicPr>
-          <p:cNvPr id="6" name="Picture 5">
-            <a:extLst>
-              <a:ext uri="{FF2B5EF4-FFF2-40B4-BE49-F238E27FC236}">
-                <a16:creationId xmlns:a16="http://schemas.microsoft.com/office/drawing/2014/main" id="{1F3AD521-49A0-327F-29F1-8C342B15D819}"/>
-              </a:ext>
-            </a:extLst>
-          </p:cNvPr>
-          <p:cNvPicPr>
-            <a:picLocks noChangeAspect="1"/>
-          </p:cNvPicPr>
-          <p:nvPr/>
-        </p:nvPicPr>
-        <p:blipFill>
-          <a:blip r:embed="rId2"/>
-          <a:stretch>
-            <a:fillRect/>
-          </a:stretch>
-        </p:blipFill>
-        <p:spPr>
-          <a:xfrm>
-            <a:off x="6268096" y="1558211"/>
-            <a:ext cx="5611093" cy="4737393"/>
-          </a:xfrm>
-          <a:prstGeom prst="rect">
-            <a:avLst/>
-          </a:prstGeom>
-        </p:spPr>
-      </p:pic>
-      <p:sp>
-        <p:nvSpPr>
-          <p:cNvPr id="2" name="Title 1">
-            <a:extLst>
-              <a:ext uri="{FF2B5EF4-FFF2-40B4-BE49-F238E27FC236}">
-                <a16:creationId xmlns:a16="http://schemas.microsoft.com/office/drawing/2014/main" id="{FF20F271-6F0D-4AC0-BB1D-F5C338165C13}"/>
-              </a:ext>
-            </a:extLst>
-          </p:cNvPr>
-          <p:cNvSpPr>
-            <a:spLocks noGrp="1"/>
-          </p:cNvSpPr>
-          <p:nvPr>
-            <p:ph type="title"/>
-          </p:nvPr>
-        </p:nvSpPr>
-        <p:spPr/>
-        <p:txBody>
-          <a:bodyPr>
-            <a:normAutofit/>
-          </a:bodyPr>
-          <a:lstStyle/>
-          <a:p>
-            <a:r>
-              <a:rPr lang="en-US" sz="3600" b="1" dirty="0"/>
-              <a:t>Export of GPON Encapsulation Mode in IPFIX</a:t>
-            </a:r>
-            <a:br>
-              <a:rPr lang="en-US" dirty="0"/>
-            </a:br>
-            <a:r>
-              <a:rPr lang="en-US" sz="3600" dirty="0">
-                <a:solidFill>
-                  <a:schemeClr val="bg2">
-                    <a:lumMod val="75000"/>
-                  </a:schemeClr>
-                </a:solidFill>
-              </a:rPr>
-              <a:t>ITU-T G.984.1 defines the General characteristics</a:t>
-            </a:r>
-          </a:p>
-        </p:txBody>
-      </p:sp>
-      <p:sp>
-        <p:nvSpPr>
-          <p:cNvPr id="3" name="Content Placeholder 2">
-            <a:extLst>
-              <a:ext uri="{FF2B5EF4-FFF2-40B4-BE49-F238E27FC236}">
-                <a16:creationId xmlns:a16="http://schemas.microsoft.com/office/drawing/2014/main" id="{29C0DFD4-432D-4B0C-93DF-790441DCF5B9}"/>
-              </a:ext>
-            </a:extLst>
-          </p:cNvPr>
-          <p:cNvSpPr>
-            <a:spLocks noGrp="1"/>
-          </p:cNvSpPr>
-          <p:nvPr>
-            <p:ph idx="1"/>
-          </p:nvPr>
-        </p:nvSpPr>
-        <p:spPr>
-          <a:xfrm>
-            <a:off x="838200" y="1825625"/>
-            <a:ext cx="4591639" cy="4351338"/>
-          </a:xfrm>
-        </p:spPr>
-        <p:txBody>
-          <a:bodyPr>
-            <a:noAutofit/>
-          </a:bodyPr>
-          <a:lstStyle/>
-          <a:p>
-            <a:r>
-              <a:rPr lang="en-US" sz="1700" dirty="0">
-                <a:hlinkClick r:id="rId3"/>
-              </a:rPr>
-              <a:t>ITU-T G.984.1 </a:t>
-            </a:r>
-            <a:r>
-              <a:rPr lang="en-US" sz="1700" dirty="0"/>
-              <a:t>defines the General characteristics of GPON.</a:t>
-            </a:r>
-          </a:p>
-          <a:p>
-            <a:r>
-              <a:rPr lang="en-US" sz="1700" dirty="0"/>
-              <a:t>Figure 2 in Section 5.2 shows the Reference Configuration.</a:t>
-            </a:r>
-          </a:p>
-          <a:p>
-            <a:r>
-              <a:rPr lang="en-US" sz="1700" dirty="0">
-                <a:solidFill>
-                  <a:srgbClr val="FF0000"/>
-                </a:solidFill>
-              </a:rPr>
-              <a:t>Red marked </a:t>
-            </a:r>
-            <a:r>
-              <a:rPr lang="en-US" sz="1700" dirty="0"/>
-              <a:t>highlights the Optical Distribution Network (ODN) where GPON Encapsulation Mode (GEM) is used between ONU/ONT and OLT.</a:t>
-            </a:r>
-          </a:p>
-        </p:txBody>
-      </p:sp>
-      <p:sp>
-        <p:nvSpPr>
-          <p:cNvPr id="16" name="Slide Number Placeholder 1">
-            <a:extLst>
-              <a:ext uri="{FF2B5EF4-FFF2-40B4-BE49-F238E27FC236}">
-                <a16:creationId xmlns:a16="http://schemas.microsoft.com/office/drawing/2014/main" id="{4D0044F8-1C12-4A59-883A-7B56B9370029}"/>
-              </a:ext>
-            </a:extLst>
-          </p:cNvPr>
-          <p:cNvSpPr>
-            <a:spLocks noGrp="1"/>
-          </p:cNvSpPr>
-          <p:nvPr>
-            <p:ph type="sldNum" sz="quarter" idx="12"/>
-          </p:nvPr>
-        </p:nvSpPr>
-        <p:spPr>
-          <a:xfrm>
-            <a:off x="11607800" y="6362700"/>
-            <a:ext cx="414338" cy="365125"/>
-          </a:xfrm>
-        </p:spPr>
-        <p:txBody>
-          <a:bodyPr/>
-          <a:lstStyle/>
-          <a:p>
-            <a:fld id="{FC4AC485-25DE-431E-B345-9C0A15BB7F8A}" type="slidenum">
-              <a:rPr lang="en-US" sz="2200" smtClean="0"/>
-              <a:t>2</a:t>
-            </a:fld>
-            <a:endParaRPr lang="en-US" sz="2200"/>
-          </a:p>
-        </p:txBody>
-      </p:sp>
-      <p:sp>
-        <p:nvSpPr>
-          <p:cNvPr id="10" name="Rectangle 9">
-            <a:extLst>
-              <a:ext uri="{FF2B5EF4-FFF2-40B4-BE49-F238E27FC236}">
-                <a16:creationId xmlns:a16="http://schemas.microsoft.com/office/drawing/2014/main" id="{8F625ECD-D3E3-440D-B425-0B3432C16578}"/>
-              </a:ext>
-            </a:extLst>
-          </p:cNvPr>
-          <p:cNvSpPr/>
-          <p:nvPr/>
-        </p:nvSpPr>
-        <p:spPr>
-          <a:xfrm>
-            <a:off x="7824156" y="2631061"/>
-            <a:ext cx="2320507" cy="530526"/>
-          </a:xfrm>
-          <a:prstGeom prst="rect">
-            <a:avLst/>
-          </a:prstGeom>
-          <a:noFill/>
-          <a:ln w="25400">
-            <a:solidFill>
-              <a:srgbClr val="FF0000"/>
-            </a:solidFill>
-          </a:ln>
-        </p:spPr>
-        <p:style>
-          <a:lnRef idx="2">
-            <a:schemeClr val="accent1">
-              <a:shade val="50000"/>
-            </a:schemeClr>
-          </a:lnRef>
-          <a:fillRef idx="1">
-            <a:schemeClr val="accent1"/>
-          </a:fillRef>
-          <a:effectRef idx="0">
-            <a:schemeClr val="accent1"/>
-          </a:effectRef>
-          <a:fontRef idx="minor">
-            <a:schemeClr val="lt1"/>
-          </a:fontRef>
-        </p:style>
-        <p:txBody>
-          <a:bodyPr rtlCol="0" anchor="ctr"/>
-          <a:lstStyle/>
-          <a:p>
-            <a:pPr algn="ctr"/>
-            <a:endParaRPr lang="en-US"/>
-          </a:p>
-        </p:txBody>
-      </p:sp>
-      <p:cxnSp>
-        <p:nvCxnSpPr>
-          <p:cNvPr id="12" name="Straight Connector 11">
-            <a:extLst>
-              <a:ext uri="{FF2B5EF4-FFF2-40B4-BE49-F238E27FC236}">
-                <a16:creationId xmlns:a16="http://schemas.microsoft.com/office/drawing/2014/main" id="{3927FFDC-F759-434D-B3B9-9F996178A9F5}"/>
-              </a:ext>
-            </a:extLst>
-          </p:cNvPr>
-          <p:cNvCxnSpPr>
-            <a:cxnSpLocks/>
-            <a:endCxn id="10" idx="1"/>
-          </p:cNvCxnSpPr>
-          <p:nvPr/>
-        </p:nvCxnSpPr>
-        <p:spPr>
-          <a:xfrm flipV="1">
-            <a:off x="5227608" y="2896324"/>
-            <a:ext cx="2596548" cy="442099"/>
-          </a:xfrm>
-          <a:prstGeom prst="line">
-            <a:avLst/>
-          </a:prstGeom>
-          <a:ln w="25400">
-            <a:solidFill>
-              <a:srgbClr val="FF0000"/>
-            </a:solidFill>
-          </a:ln>
-        </p:spPr>
-        <p:style>
-          <a:lnRef idx="1">
-            <a:schemeClr val="accent1"/>
-          </a:lnRef>
-          <a:fillRef idx="0">
-            <a:schemeClr val="accent1"/>
-          </a:fillRef>
-          <a:effectRef idx="0">
-            <a:schemeClr val="accent1"/>
-          </a:effectRef>
-          <a:fontRef idx="minor">
-            <a:schemeClr val="tx1"/>
-          </a:fontRef>
-        </p:style>
-      </p:cxnSp>
-    </p:spTree>
-    <p:extLst>
-      <p:ext uri="{BB962C8B-B14F-4D97-AF65-F5344CB8AC3E}">
-        <p14:creationId xmlns:p14="http://schemas.microsoft.com/office/powerpoint/2010/main" val="728278235"/>
-      </p:ext>
-    </p:extLst>
-  </p:cSld>
-  <p:clrMapOvr>
-    <a:masterClrMapping/>
-  </p:clrMapOvr>
-</p:sld>
-</file>
-
-<file path=ppt/slides/slide3.xml><?xml version="1.0" encoding="utf-8"?>
-<p:sld xmlns:a="http://schemas.openxmlformats.org/drawingml/2006/main" xmlns:r="http://schemas.openxmlformats.org/officeDocument/2006/relationships" xmlns:p="http://schemas.openxmlformats.org/presentationml/2006/main">
-  <p:cSld>
-    <p:spTree>
-      <p:nvGrpSpPr>
-        <p:cNvPr id="1" name=""/>
-        <p:cNvGrpSpPr/>
-        <p:nvPr/>
-      </p:nvGrpSpPr>
-      <p:grpSpPr>
-        <a:xfrm>
-          <a:off x="0" y="0"/>
-          <a:ext cx="0" cy="0"/>
-          <a:chOff x="0" y="0"/>
-          <a:chExt cx="0" cy="0"/>
-        </a:xfrm>
-      </p:grpSpPr>
-      <p:pic>
-        <p:nvPicPr>
           <p:cNvPr id="5" name="Picture 4">
             <a:extLst>
               <a:ext uri="{FF2B5EF4-FFF2-40B4-BE49-F238E27FC236}">
@@ -5116,7 +4833,7 @@
           <a:p>
             <a:fld id="{FC4AC485-25DE-431E-B345-9C0A15BB7F8A}" type="slidenum">
               <a:rPr lang="en-US" sz="2200" smtClean="0"/>
-              <a:t>3</a:t>
+              <a:t>2</a:t>
             </a:fld>
             <a:endParaRPr lang="en-US" sz="2200"/>
           </a:p>
@@ -5231,7 +4948,7 @@
 </p:sld>
 </file>
 
-<file path=ppt/slides/slide4.xml><?xml version="1.0" encoding="utf-8"?>
+<file path=ppt/slides/slide3.xml><?xml version="1.0" encoding="utf-8"?>
 <p:sld xmlns:a="http://schemas.openxmlformats.org/drawingml/2006/main" xmlns:r="http://schemas.openxmlformats.org/officeDocument/2006/relationships" xmlns:p="http://schemas.openxmlformats.org/presentationml/2006/main">
   <p:cSld>
     <p:spTree>
@@ -5496,7 +5213,7 @@
           <a:p>
             <a:fld id="{FC4AC485-25DE-431E-B345-9C0A15BB7F8A}" type="slidenum">
               <a:rPr lang="en-US" sz="2200" smtClean="0"/>
-              <a:t>4</a:t>
+              <a:t>3</a:t>
             </a:fld>
             <a:endParaRPr lang="en-US" sz="2200"/>
           </a:p>
@@ -5611,7 +5328,7 @@
 </p:sld>
 </file>
 
-<file path=ppt/slides/slide5.xml><?xml version="1.0" encoding="utf-8"?>
+<file path=ppt/slides/slide4.xml><?xml version="1.0" encoding="utf-8"?>
 <p:sld xmlns:a="http://schemas.openxmlformats.org/drawingml/2006/main" xmlns:r="http://schemas.openxmlformats.org/officeDocument/2006/relationships" xmlns:p="http://schemas.openxmlformats.org/presentationml/2006/main">
   <p:cSld>
     <p:spTree>
@@ -6086,7 +5803,7 @@
           <a:p>
             <a:fld id="{FC4AC485-25DE-431E-B345-9C0A15BB7F8A}" type="slidenum">
               <a:rPr lang="en-US" sz="2200" smtClean="0"/>
-              <a:t>5</a:t>
+              <a:t>4</a:t>
             </a:fld>
             <a:endParaRPr lang="en-US" sz="2200" dirty="0"/>
           </a:p>
@@ -6135,7 +5852,7 @@
 </p:sld>
 </file>
 
-<file path=ppt/slides/slide6.xml><?xml version="1.0" encoding="utf-8"?>
+<file path=ppt/slides/slide5.xml><?xml version="1.0" encoding="utf-8"?>
 <p:sld xmlns:a="http://schemas.openxmlformats.org/drawingml/2006/main" xmlns:r="http://schemas.openxmlformats.org/officeDocument/2006/relationships" xmlns:p="http://schemas.openxmlformats.org/presentationml/2006/main">
   <p:cSld>
     <p:spTree>
@@ -6180,2247 +5897,6 @@
               <a:t>Export of GPON Encapsulation Mode in IPFIX</a:t>
             </a:r>
             <a:br>
-              <a:rPr lang="en-US" dirty="0"/>
-            </a:br>
-            <a:r>
-              <a:rPr lang="de-CH" sz="3200" dirty="0">
-                <a:solidFill>
-                  <a:schemeClr val="bg2">
-                    <a:lumMod val="75000"/>
-                  </a:schemeClr>
-                </a:solidFill>
-              </a:rPr>
-              <a:t>IPFIX G-PON </a:t>
-            </a:r>
-            <a:r>
-              <a:rPr lang="de-CH" sz="3200" dirty="0" err="1">
-                <a:solidFill>
-                  <a:schemeClr val="bg2">
-                    <a:lumMod val="75000"/>
-                  </a:schemeClr>
-                </a:solidFill>
-              </a:rPr>
-              <a:t>Encapsulation</a:t>
-            </a:r>
-            <a:r>
-              <a:rPr lang="de-CH" sz="3200" dirty="0">
-                <a:solidFill>
-                  <a:schemeClr val="bg2">
-                    <a:lumMod val="75000"/>
-                  </a:schemeClr>
-                </a:solidFill>
-              </a:rPr>
-              <a:t> Method PTI </a:t>
-            </a:r>
-            <a:r>
-              <a:rPr lang="de-CH" sz="3200" dirty="0" err="1">
-                <a:solidFill>
-                  <a:schemeClr val="bg2">
-                    <a:lumMod val="75000"/>
-                  </a:schemeClr>
-                </a:solidFill>
-              </a:rPr>
-              <a:t>Subregistry</a:t>
-            </a:r>
-            <a:endParaRPr lang="en-US" sz="3200" dirty="0">
-              <a:solidFill>
-                <a:schemeClr val="bg2">
-                  <a:lumMod val="75000"/>
-                </a:schemeClr>
-              </a:solidFill>
-            </a:endParaRPr>
-          </a:p>
-        </p:txBody>
-      </p:sp>
-      <p:sp>
-        <p:nvSpPr>
-          <p:cNvPr id="16" name="Slide Number Placeholder 1">
-            <a:extLst>
-              <a:ext uri="{FF2B5EF4-FFF2-40B4-BE49-F238E27FC236}">
-                <a16:creationId xmlns:a16="http://schemas.microsoft.com/office/drawing/2014/main" id="{4D0044F8-1C12-4A59-883A-7B56B9370029}"/>
-              </a:ext>
-            </a:extLst>
-          </p:cNvPr>
-          <p:cNvSpPr>
-            <a:spLocks noGrp="1"/>
-          </p:cNvSpPr>
-          <p:nvPr>
-            <p:ph type="sldNum" sz="quarter" idx="12"/>
-          </p:nvPr>
-        </p:nvSpPr>
-        <p:spPr>
-          <a:xfrm>
-            <a:off x="11607800" y="6362700"/>
-            <a:ext cx="414338" cy="365125"/>
-          </a:xfrm>
-        </p:spPr>
-        <p:txBody>
-          <a:bodyPr/>
-          <a:lstStyle/>
-          <a:p>
-            <a:fld id="{FC4AC485-25DE-431E-B345-9C0A15BB7F8A}" type="slidenum">
-              <a:rPr lang="en-US" sz="2200" smtClean="0"/>
-              <a:t>6</a:t>
-            </a:fld>
-            <a:endParaRPr lang="en-US" sz="2200"/>
-          </a:p>
-        </p:txBody>
-      </p:sp>
-      <p:sp>
-        <p:nvSpPr>
-          <p:cNvPr id="7" name="TextBox 6">
-            <a:extLst>
-              <a:ext uri="{FF2B5EF4-FFF2-40B4-BE49-F238E27FC236}">
-                <a16:creationId xmlns:a16="http://schemas.microsoft.com/office/drawing/2014/main" id="{99720B6A-6FC0-175F-D413-502D123E7F32}"/>
-              </a:ext>
-            </a:extLst>
-          </p:cNvPr>
-          <p:cNvSpPr txBox="1"/>
-          <p:nvPr/>
-        </p:nvSpPr>
-        <p:spPr>
-          <a:xfrm>
-            <a:off x="838200" y="3223379"/>
-            <a:ext cx="4837981" cy="3139321"/>
-          </a:xfrm>
-          <a:prstGeom prst="rect">
-            <a:avLst/>
-          </a:prstGeom>
-          <a:noFill/>
-        </p:spPr>
-        <p:txBody>
-          <a:bodyPr wrap="square">
-            <a:spAutoFit/>
-          </a:bodyPr>
-          <a:lstStyle/>
-          <a:p>
-            <a:r>
-              <a:rPr lang="de-CH" sz="900" dirty="0">
-                <a:latin typeface="Courier New" panose="02070309020205020404" pitchFamily="49" charset="0"/>
-                <a:cs typeface="Courier New" panose="02070309020205020404" pitchFamily="49" charset="0"/>
-              </a:rPr>
-              <a:t>+-------+----------------------------------------------------------+</a:t>
-            </a:r>
-          </a:p>
-          <a:p>
-            <a:r>
-              <a:rPr lang="de-CH" sz="900" dirty="0">
-                <a:latin typeface="Courier New" panose="02070309020205020404" pitchFamily="49" charset="0"/>
-                <a:cs typeface="Courier New" panose="02070309020205020404" pitchFamily="49" charset="0"/>
-              </a:rPr>
-              <a:t>| Value |       GEM PTI Content Type </a:t>
-            </a:r>
-            <a:r>
-              <a:rPr lang="de-CH" sz="900" dirty="0" err="1">
-                <a:latin typeface="Courier New" panose="02070309020205020404" pitchFamily="49" charset="0"/>
-                <a:cs typeface="Courier New" panose="02070309020205020404" pitchFamily="49" charset="0"/>
-              </a:rPr>
-              <a:t>Meaning</a:t>
-            </a:r>
-            <a:r>
-              <a:rPr lang="de-CH" sz="900" dirty="0">
-                <a:latin typeface="Courier New" panose="02070309020205020404" pitchFamily="49" charset="0"/>
-                <a:cs typeface="Courier New" panose="02070309020205020404" pitchFamily="49" charset="0"/>
-              </a:rPr>
-              <a:t>         | Additional  |</a:t>
-            </a:r>
-          </a:p>
-          <a:p>
-            <a:r>
-              <a:rPr lang="de-CH" sz="900" dirty="0">
-                <a:latin typeface="Courier New" panose="02070309020205020404" pitchFamily="49" charset="0"/>
-                <a:cs typeface="Courier New" panose="02070309020205020404" pitchFamily="49" charset="0"/>
-              </a:rPr>
-              <a:t>|       |                                            | Information |</a:t>
-            </a:r>
-          </a:p>
-          <a:p>
-            <a:r>
-              <a:rPr lang="de-CH" sz="900" dirty="0">
-                <a:latin typeface="Courier New" panose="02070309020205020404" pitchFamily="49" charset="0"/>
-                <a:cs typeface="Courier New" panose="02070309020205020404" pitchFamily="49" charset="0"/>
-              </a:rPr>
-              <a:t>+-------+----------------------------------------------------------+</a:t>
-            </a:r>
-          </a:p>
-          <a:p>
-            <a:r>
-              <a:rPr lang="de-CH" sz="900" dirty="0">
-                <a:latin typeface="Courier New" panose="02070309020205020404" pitchFamily="49" charset="0"/>
-                <a:cs typeface="Courier New" panose="02070309020205020404" pitchFamily="49" charset="0"/>
-              </a:rPr>
-              <a:t>|  000  | User </a:t>
-            </a:r>
-            <a:r>
-              <a:rPr lang="de-CH" sz="900" dirty="0" err="1">
-                <a:latin typeface="Courier New" panose="02070309020205020404" pitchFamily="49" charset="0"/>
-                <a:cs typeface="Courier New" panose="02070309020205020404" pitchFamily="49" charset="0"/>
-              </a:rPr>
-              <a:t>data</a:t>
-            </a:r>
-            <a:r>
-              <a:rPr lang="de-CH" sz="900" dirty="0">
-                <a:latin typeface="Courier New" panose="02070309020205020404" pitchFamily="49" charset="0"/>
-                <a:cs typeface="Courier New" panose="02070309020205020404" pitchFamily="49" charset="0"/>
-              </a:rPr>
-              <a:t> </a:t>
-            </a:r>
-            <a:r>
-              <a:rPr lang="de-CH" sz="900" dirty="0" err="1">
-                <a:latin typeface="Courier New" panose="02070309020205020404" pitchFamily="49" charset="0"/>
-                <a:cs typeface="Courier New" panose="02070309020205020404" pitchFamily="49" charset="0"/>
-              </a:rPr>
-              <a:t>fragment</a:t>
-            </a:r>
-            <a:r>
-              <a:rPr lang="de-CH" sz="900" dirty="0">
-                <a:latin typeface="Courier New" panose="02070309020205020404" pitchFamily="49" charset="0"/>
-                <a:cs typeface="Courier New" panose="02070309020205020404" pitchFamily="49" charset="0"/>
-              </a:rPr>
-              <a:t>, not </a:t>
-            </a:r>
-            <a:r>
-              <a:rPr lang="de-CH" sz="900" dirty="0" err="1">
-                <a:latin typeface="Courier New" panose="02070309020205020404" pitchFamily="49" charset="0"/>
-                <a:cs typeface="Courier New" panose="02070309020205020404" pitchFamily="49" charset="0"/>
-              </a:rPr>
-              <a:t>the</a:t>
-            </a:r>
-            <a:r>
-              <a:rPr lang="de-CH" sz="900" dirty="0">
-                <a:latin typeface="Courier New" panose="02070309020205020404" pitchFamily="49" charset="0"/>
-                <a:cs typeface="Courier New" panose="02070309020205020404" pitchFamily="49" charset="0"/>
-              </a:rPr>
-              <a:t> end of a frame | [RFC-</a:t>
-            </a:r>
-            <a:r>
-              <a:rPr lang="de-CH" sz="900" dirty="0" err="1">
-                <a:latin typeface="Courier New" panose="02070309020205020404" pitchFamily="49" charset="0"/>
-                <a:cs typeface="Courier New" panose="02070309020205020404" pitchFamily="49" charset="0"/>
-              </a:rPr>
-              <a:t>to</a:t>
-            </a:r>
-            <a:r>
-              <a:rPr lang="de-CH" sz="900" dirty="0">
-                <a:latin typeface="Courier New" panose="02070309020205020404" pitchFamily="49" charset="0"/>
-                <a:cs typeface="Courier New" panose="02070309020205020404" pitchFamily="49" charset="0"/>
-              </a:rPr>
-              <a:t>-</a:t>
-            </a:r>
-            <a:r>
-              <a:rPr lang="de-CH" sz="900" dirty="0" err="1">
-                <a:latin typeface="Courier New" panose="02070309020205020404" pitchFamily="49" charset="0"/>
-                <a:cs typeface="Courier New" panose="02070309020205020404" pitchFamily="49" charset="0"/>
-              </a:rPr>
-              <a:t>be</a:t>
-            </a:r>
-            <a:r>
-              <a:rPr lang="de-CH" sz="900" dirty="0">
-                <a:latin typeface="Courier New" panose="02070309020205020404" pitchFamily="49" charset="0"/>
-                <a:cs typeface="Courier New" panose="02070309020205020404" pitchFamily="49" charset="0"/>
-              </a:rPr>
-              <a:t>] |</a:t>
-            </a:r>
-          </a:p>
-          <a:p>
-            <a:r>
-              <a:rPr lang="de-CH" sz="900" dirty="0">
-                <a:latin typeface="Courier New" panose="02070309020205020404" pitchFamily="49" charset="0"/>
-                <a:cs typeface="Courier New" panose="02070309020205020404" pitchFamily="49" charset="0"/>
-              </a:rPr>
-              <a:t>+-------+----------------------------------------------------------+</a:t>
-            </a:r>
-          </a:p>
-          <a:p>
-            <a:r>
-              <a:rPr lang="de-CH" sz="900" dirty="0">
-                <a:latin typeface="Courier New" panose="02070309020205020404" pitchFamily="49" charset="0"/>
-                <a:cs typeface="Courier New" panose="02070309020205020404" pitchFamily="49" charset="0"/>
-              </a:rPr>
-              <a:t>|  001  | User </a:t>
-            </a:r>
-            <a:r>
-              <a:rPr lang="de-CH" sz="900" dirty="0" err="1">
-                <a:latin typeface="Courier New" panose="02070309020205020404" pitchFamily="49" charset="0"/>
-                <a:cs typeface="Courier New" panose="02070309020205020404" pitchFamily="49" charset="0"/>
-              </a:rPr>
-              <a:t>data</a:t>
-            </a:r>
-            <a:r>
-              <a:rPr lang="de-CH" sz="900" dirty="0">
-                <a:latin typeface="Courier New" panose="02070309020205020404" pitchFamily="49" charset="0"/>
-                <a:cs typeface="Courier New" panose="02070309020205020404" pitchFamily="49" charset="0"/>
-              </a:rPr>
-              <a:t> </a:t>
-            </a:r>
-            <a:r>
-              <a:rPr lang="de-CH" sz="900" dirty="0" err="1">
-                <a:latin typeface="Courier New" panose="02070309020205020404" pitchFamily="49" charset="0"/>
-                <a:cs typeface="Courier New" panose="02070309020205020404" pitchFamily="49" charset="0"/>
-              </a:rPr>
-              <a:t>fragment</a:t>
-            </a:r>
-            <a:r>
-              <a:rPr lang="de-CH" sz="900" dirty="0">
-                <a:latin typeface="Courier New" panose="02070309020205020404" pitchFamily="49" charset="0"/>
-                <a:cs typeface="Courier New" panose="02070309020205020404" pitchFamily="49" charset="0"/>
-              </a:rPr>
-              <a:t>, end of a frame         | [RFC-</a:t>
-            </a:r>
-            <a:r>
-              <a:rPr lang="de-CH" sz="900" dirty="0" err="1">
-                <a:latin typeface="Courier New" panose="02070309020205020404" pitchFamily="49" charset="0"/>
-                <a:cs typeface="Courier New" panose="02070309020205020404" pitchFamily="49" charset="0"/>
-              </a:rPr>
-              <a:t>to</a:t>
-            </a:r>
-            <a:r>
-              <a:rPr lang="de-CH" sz="900" dirty="0">
-                <a:latin typeface="Courier New" panose="02070309020205020404" pitchFamily="49" charset="0"/>
-                <a:cs typeface="Courier New" panose="02070309020205020404" pitchFamily="49" charset="0"/>
-              </a:rPr>
-              <a:t>-</a:t>
-            </a:r>
-            <a:r>
-              <a:rPr lang="de-CH" sz="900" dirty="0" err="1">
-                <a:latin typeface="Courier New" panose="02070309020205020404" pitchFamily="49" charset="0"/>
-                <a:cs typeface="Courier New" panose="02070309020205020404" pitchFamily="49" charset="0"/>
-              </a:rPr>
-              <a:t>be</a:t>
-            </a:r>
-            <a:r>
-              <a:rPr lang="de-CH" sz="900" dirty="0">
-                <a:latin typeface="Courier New" panose="02070309020205020404" pitchFamily="49" charset="0"/>
-                <a:cs typeface="Courier New" panose="02070309020205020404" pitchFamily="49" charset="0"/>
-              </a:rPr>
-              <a:t>] |</a:t>
-            </a:r>
-          </a:p>
-          <a:p>
-            <a:r>
-              <a:rPr lang="de-CH" sz="900" dirty="0">
-                <a:latin typeface="Courier New" panose="02070309020205020404" pitchFamily="49" charset="0"/>
-                <a:cs typeface="Courier New" panose="02070309020205020404" pitchFamily="49" charset="0"/>
-              </a:rPr>
-              <a:t>+-------+----------------------------------------------------------+</a:t>
-            </a:r>
-          </a:p>
-          <a:p>
-            <a:r>
-              <a:rPr lang="de-CH" sz="900" dirty="0">
-                <a:latin typeface="Courier New" panose="02070309020205020404" pitchFamily="49" charset="0"/>
-                <a:cs typeface="Courier New" panose="02070309020205020404" pitchFamily="49" charset="0"/>
-              </a:rPr>
-              <a:t>|  010  | Reserved                                   | [RFC-</a:t>
-            </a:r>
-            <a:r>
-              <a:rPr lang="de-CH" sz="900" dirty="0" err="1">
-                <a:latin typeface="Courier New" panose="02070309020205020404" pitchFamily="49" charset="0"/>
-                <a:cs typeface="Courier New" panose="02070309020205020404" pitchFamily="49" charset="0"/>
-              </a:rPr>
-              <a:t>to</a:t>
-            </a:r>
-            <a:r>
-              <a:rPr lang="de-CH" sz="900" dirty="0">
-                <a:latin typeface="Courier New" panose="02070309020205020404" pitchFamily="49" charset="0"/>
-                <a:cs typeface="Courier New" panose="02070309020205020404" pitchFamily="49" charset="0"/>
-              </a:rPr>
-              <a:t>-</a:t>
-            </a:r>
-            <a:r>
-              <a:rPr lang="de-CH" sz="900" dirty="0" err="1">
-                <a:latin typeface="Courier New" panose="02070309020205020404" pitchFamily="49" charset="0"/>
-                <a:cs typeface="Courier New" panose="02070309020205020404" pitchFamily="49" charset="0"/>
-              </a:rPr>
-              <a:t>be</a:t>
-            </a:r>
-            <a:r>
-              <a:rPr lang="de-CH" sz="900" dirty="0">
-                <a:latin typeface="Courier New" panose="02070309020205020404" pitchFamily="49" charset="0"/>
-                <a:cs typeface="Courier New" panose="02070309020205020404" pitchFamily="49" charset="0"/>
-              </a:rPr>
-              <a:t>] |</a:t>
-            </a:r>
-          </a:p>
-          <a:p>
-            <a:r>
-              <a:rPr lang="de-CH" sz="900" dirty="0">
-                <a:latin typeface="Courier New" panose="02070309020205020404" pitchFamily="49" charset="0"/>
-                <a:cs typeface="Courier New" panose="02070309020205020404" pitchFamily="49" charset="0"/>
-              </a:rPr>
-              <a:t>+-------+----------------------------------------------------------+</a:t>
-            </a:r>
-          </a:p>
-          <a:p>
-            <a:r>
-              <a:rPr lang="de-CH" sz="900" dirty="0">
-                <a:latin typeface="Courier New" panose="02070309020205020404" pitchFamily="49" charset="0"/>
-                <a:cs typeface="Courier New" panose="02070309020205020404" pitchFamily="49" charset="0"/>
-              </a:rPr>
-              <a:t>|  011  | Reserved                                   | [RFC-</a:t>
-            </a:r>
-            <a:r>
-              <a:rPr lang="de-CH" sz="900" dirty="0" err="1">
-                <a:latin typeface="Courier New" panose="02070309020205020404" pitchFamily="49" charset="0"/>
-                <a:cs typeface="Courier New" panose="02070309020205020404" pitchFamily="49" charset="0"/>
-              </a:rPr>
-              <a:t>to</a:t>
-            </a:r>
-            <a:r>
-              <a:rPr lang="de-CH" sz="900" dirty="0">
-                <a:latin typeface="Courier New" panose="02070309020205020404" pitchFamily="49" charset="0"/>
-                <a:cs typeface="Courier New" panose="02070309020205020404" pitchFamily="49" charset="0"/>
-              </a:rPr>
-              <a:t>-</a:t>
-            </a:r>
-            <a:r>
-              <a:rPr lang="de-CH" sz="900" dirty="0" err="1">
-                <a:latin typeface="Courier New" panose="02070309020205020404" pitchFamily="49" charset="0"/>
-                <a:cs typeface="Courier New" panose="02070309020205020404" pitchFamily="49" charset="0"/>
-              </a:rPr>
-              <a:t>be</a:t>
-            </a:r>
-            <a:r>
-              <a:rPr lang="de-CH" sz="900" dirty="0">
-                <a:latin typeface="Courier New" panose="02070309020205020404" pitchFamily="49" charset="0"/>
-                <a:cs typeface="Courier New" panose="02070309020205020404" pitchFamily="49" charset="0"/>
-              </a:rPr>
-              <a:t>] |</a:t>
-            </a:r>
-          </a:p>
-          <a:p>
-            <a:r>
-              <a:rPr lang="de-CH" sz="900" dirty="0">
-                <a:latin typeface="Courier New" panose="02070309020205020404" pitchFamily="49" charset="0"/>
-                <a:cs typeface="Courier New" panose="02070309020205020404" pitchFamily="49" charset="0"/>
-              </a:rPr>
-              <a:t>+-------+----------------------------------------------------------+</a:t>
-            </a:r>
-          </a:p>
-          <a:p>
-            <a:r>
-              <a:rPr lang="de-CH" sz="900" dirty="0">
-                <a:latin typeface="Courier New" panose="02070309020205020404" pitchFamily="49" charset="0"/>
-                <a:cs typeface="Courier New" panose="02070309020205020404" pitchFamily="49" charset="0"/>
-              </a:rPr>
-              <a:t>|  100  | GEM OAM, not </a:t>
-            </a:r>
-            <a:r>
-              <a:rPr lang="de-CH" sz="900" dirty="0" err="1">
-                <a:latin typeface="Courier New" panose="02070309020205020404" pitchFamily="49" charset="0"/>
-                <a:cs typeface="Courier New" panose="02070309020205020404" pitchFamily="49" charset="0"/>
-              </a:rPr>
-              <a:t>the</a:t>
-            </a:r>
-            <a:r>
-              <a:rPr lang="de-CH" sz="900" dirty="0">
-                <a:latin typeface="Courier New" panose="02070309020205020404" pitchFamily="49" charset="0"/>
-                <a:cs typeface="Courier New" panose="02070309020205020404" pitchFamily="49" charset="0"/>
-              </a:rPr>
-              <a:t> end of a frame            | [RFC-</a:t>
-            </a:r>
-            <a:r>
-              <a:rPr lang="de-CH" sz="900" dirty="0" err="1">
-                <a:latin typeface="Courier New" panose="02070309020205020404" pitchFamily="49" charset="0"/>
-                <a:cs typeface="Courier New" panose="02070309020205020404" pitchFamily="49" charset="0"/>
-              </a:rPr>
-              <a:t>to</a:t>
-            </a:r>
-            <a:r>
-              <a:rPr lang="de-CH" sz="900" dirty="0">
-                <a:latin typeface="Courier New" panose="02070309020205020404" pitchFamily="49" charset="0"/>
-                <a:cs typeface="Courier New" panose="02070309020205020404" pitchFamily="49" charset="0"/>
-              </a:rPr>
-              <a:t>-</a:t>
-            </a:r>
-            <a:r>
-              <a:rPr lang="de-CH" sz="900" dirty="0" err="1">
-                <a:latin typeface="Courier New" panose="02070309020205020404" pitchFamily="49" charset="0"/>
-                <a:cs typeface="Courier New" panose="02070309020205020404" pitchFamily="49" charset="0"/>
-              </a:rPr>
-              <a:t>be</a:t>
-            </a:r>
-            <a:r>
-              <a:rPr lang="de-CH" sz="900" dirty="0">
-                <a:latin typeface="Courier New" panose="02070309020205020404" pitchFamily="49" charset="0"/>
-                <a:cs typeface="Courier New" panose="02070309020205020404" pitchFamily="49" charset="0"/>
-              </a:rPr>
-              <a:t>] |</a:t>
-            </a:r>
-          </a:p>
-          <a:p>
-            <a:r>
-              <a:rPr lang="de-CH" sz="900" dirty="0">
-                <a:latin typeface="Courier New" panose="02070309020205020404" pitchFamily="49" charset="0"/>
-                <a:cs typeface="Courier New" panose="02070309020205020404" pitchFamily="49" charset="0"/>
-              </a:rPr>
-              <a:t>+-------+----------------------------------------------------------+</a:t>
-            </a:r>
-          </a:p>
-          <a:p>
-            <a:r>
-              <a:rPr lang="de-CH" sz="900" dirty="0">
-                <a:latin typeface="Courier New" panose="02070309020205020404" pitchFamily="49" charset="0"/>
-                <a:cs typeface="Courier New" panose="02070309020205020404" pitchFamily="49" charset="0"/>
-              </a:rPr>
-              <a:t>|  101  | GEM OAM, end of a frame                    | [RFC-</a:t>
-            </a:r>
-            <a:r>
-              <a:rPr lang="de-CH" sz="900" dirty="0" err="1">
-                <a:latin typeface="Courier New" panose="02070309020205020404" pitchFamily="49" charset="0"/>
-                <a:cs typeface="Courier New" panose="02070309020205020404" pitchFamily="49" charset="0"/>
-              </a:rPr>
-              <a:t>to</a:t>
-            </a:r>
-            <a:r>
-              <a:rPr lang="de-CH" sz="900" dirty="0">
-                <a:latin typeface="Courier New" panose="02070309020205020404" pitchFamily="49" charset="0"/>
-                <a:cs typeface="Courier New" panose="02070309020205020404" pitchFamily="49" charset="0"/>
-              </a:rPr>
-              <a:t>-</a:t>
-            </a:r>
-            <a:r>
-              <a:rPr lang="de-CH" sz="900" dirty="0" err="1">
-                <a:latin typeface="Courier New" panose="02070309020205020404" pitchFamily="49" charset="0"/>
-                <a:cs typeface="Courier New" panose="02070309020205020404" pitchFamily="49" charset="0"/>
-              </a:rPr>
-              <a:t>be</a:t>
-            </a:r>
-            <a:r>
-              <a:rPr lang="de-CH" sz="900" dirty="0">
-                <a:latin typeface="Courier New" panose="02070309020205020404" pitchFamily="49" charset="0"/>
-                <a:cs typeface="Courier New" panose="02070309020205020404" pitchFamily="49" charset="0"/>
-              </a:rPr>
-              <a:t>] |</a:t>
-            </a:r>
-          </a:p>
-          <a:p>
-            <a:r>
-              <a:rPr lang="de-CH" sz="900" dirty="0">
-                <a:latin typeface="Courier New" panose="02070309020205020404" pitchFamily="49" charset="0"/>
-                <a:cs typeface="Courier New" panose="02070309020205020404" pitchFamily="49" charset="0"/>
-              </a:rPr>
-              <a:t>+-------+----------------------------------------------------------+</a:t>
-            </a:r>
-          </a:p>
-          <a:p>
-            <a:r>
-              <a:rPr lang="de-CH" sz="900" dirty="0">
-                <a:latin typeface="Courier New" panose="02070309020205020404" pitchFamily="49" charset="0"/>
-                <a:cs typeface="Courier New" panose="02070309020205020404" pitchFamily="49" charset="0"/>
-              </a:rPr>
-              <a:t>|  110  | Reserved                                   | [RFC-</a:t>
-            </a:r>
-            <a:r>
-              <a:rPr lang="de-CH" sz="900" dirty="0" err="1">
-                <a:latin typeface="Courier New" panose="02070309020205020404" pitchFamily="49" charset="0"/>
-                <a:cs typeface="Courier New" panose="02070309020205020404" pitchFamily="49" charset="0"/>
-              </a:rPr>
-              <a:t>to</a:t>
-            </a:r>
-            <a:r>
-              <a:rPr lang="de-CH" sz="900" dirty="0">
-                <a:latin typeface="Courier New" panose="02070309020205020404" pitchFamily="49" charset="0"/>
-                <a:cs typeface="Courier New" panose="02070309020205020404" pitchFamily="49" charset="0"/>
-              </a:rPr>
-              <a:t>-</a:t>
-            </a:r>
-            <a:r>
-              <a:rPr lang="de-CH" sz="900" dirty="0" err="1">
-                <a:latin typeface="Courier New" panose="02070309020205020404" pitchFamily="49" charset="0"/>
-                <a:cs typeface="Courier New" panose="02070309020205020404" pitchFamily="49" charset="0"/>
-              </a:rPr>
-              <a:t>be</a:t>
-            </a:r>
-            <a:r>
-              <a:rPr lang="de-CH" sz="900" dirty="0">
-                <a:latin typeface="Courier New" panose="02070309020205020404" pitchFamily="49" charset="0"/>
-                <a:cs typeface="Courier New" panose="02070309020205020404" pitchFamily="49" charset="0"/>
-              </a:rPr>
-              <a:t>] |</a:t>
-            </a:r>
-          </a:p>
-          <a:p>
-            <a:r>
-              <a:rPr lang="de-CH" sz="900" dirty="0">
-                <a:latin typeface="Courier New" panose="02070309020205020404" pitchFamily="49" charset="0"/>
-                <a:cs typeface="Courier New" panose="02070309020205020404" pitchFamily="49" charset="0"/>
-              </a:rPr>
-              <a:t>+-------+----------------------------------------------------------+</a:t>
-            </a:r>
-          </a:p>
-          <a:p>
-            <a:r>
-              <a:rPr lang="de-CH" sz="900" dirty="0">
-                <a:latin typeface="Courier New" panose="02070309020205020404" pitchFamily="49" charset="0"/>
-                <a:cs typeface="Courier New" panose="02070309020205020404" pitchFamily="49" charset="0"/>
-              </a:rPr>
-              <a:t>|  111  | Reserved                                   | [RFC-</a:t>
-            </a:r>
-            <a:r>
-              <a:rPr lang="de-CH" sz="900" dirty="0" err="1">
-                <a:latin typeface="Courier New" panose="02070309020205020404" pitchFamily="49" charset="0"/>
-                <a:cs typeface="Courier New" panose="02070309020205020404" pitchFamily="49" charset="0"/>
-              </a:rPr>
-              <a:t>to</a:t>
-            </a:r>
-            <a:r>
-              <a:rPr lang="de-CH" sz="900" dirty="0">
-                <a:latin typeface="Courier New" panose="02070309020205020404" pitchFamily="49" charset="0"/>
-                <a:cs typeface="Courier New" panose="02070309020205020404" pitchFamily="49" charset="0"/>
-              </a:rPr>
-              <a:t>-</a:t>
-            </a:r>
-            <a:r>
-              <a:rPr lang="de-CH" sz="900" dirty="0" err="1">
-                <a:latin typeface="Courier New" panose="02070309020205020404" pitchFamily="49" charset="0"/>
-                <a:cs typeface="Courier New" panose="02070309020205020404" pitchFamily="49" charset="0"/>
-              </a:rPr>
-              <a:t>be</a:t>
-            </a:r>
-            <a:r>
-              <a:rPr lang="de-CH" sz="900" dirty="0">
-                <a:latin typeface="Courier New" panose="02070309020205020404" pitchFamily="49" charset="0"/>
-                <a:cs typeface="Courier New" panose="02070309020205020404" pitchFamily="49" charset="0"/>
-              </a:rPr>
-              <a:t>] |</a:t>
-            </a:r>
-          </a:p>
-          <a:p>
-            <a:r>
-              <a:rPr lang="de-CH" sz="900" dirty="0">
-                <a:latin typeface="Courier New" panose="02070309020205020404" pitchFamily="49" charset="0"/>
-                <a:cs typeface="Courier New" panose="02070309020205020404" pitchFamily="49" charset="0"/>
-              </a:rPr>
-              <a:t>+-------+----------------------------------------------------------+</a:t>
-            </a:r>
-          </a:p>
-          <a:p>
-            <a:endParaRPr lang="de-CH" sz="900" dirty="0">
-              <a:latin typeface="Courier New" panose="02070309020205020404" pitchFamily="49" charset="0"/>
-              <a:cs typeface="Courier New" panose="02070309020205020404" pitchFamily="49" charset="0"/>
-            </a:endParaRPr>
-          </a:p>
-          <a:p>
-            <a:r>
-              <a:rPr lang="de-CH" sz="900" dirty="0">
-                <a:latin typeface="Courier New" panose="02070309020205020404" pitchFamily="49" charset="0"/>
-                <a:cs typeface="Courier New" panose="02070309020205020404" pitchFamily="49" charset="0"/>
-              </a:rPr>
-              <a:t>        Table 2: "IPFIX G-PON </a:t>
-            </a:r>
-            <a:r>
-              <a:rPr lang="de-CH" sz="900" dirty="0" err="1">
-                <a:latin typeface="Courier New" panose="02070309020205020404" pitchFamily="49" charset="0"/>
-                <a:cs typeface="Courier New" panose="02070309020205020404" pitchFamily="49" charset="0"/>
-              </a:rPr>
-              <a:t>Encapsulation</a:t>
-            </a:r>
-            <a:r>
-              <a:rPr lang="de-CH" sz="900" dirty="0">
-                <a:latin typeface="Courier New" panose="02070309020205020404" pitchFamily="49" charset="0"/>
-                <a:cs typeface="Courier New" panose="02070309020205020404" pitchFamily="49" charset="0"/>
-              </a:rPr>
-              <a:t> Method PTI" </a:t>
-            </a:r>
-            <a:r>
-              <a:rPr lang="de-CH" sz="900" dirty="0" err="1">
-                <a:latin typeface="Courier New" panose="02070309020205020404" pitchFamily="49" charset="0"/>
-                <a:cs typeface="Courier New" panose="02070309020205020404" pitchFamily="49" charset="0"/>
-              </a:rPr>
-              <a:t>Subregistry</a:t>
-            </a:r>
-            <a:endParaRPr lang="de-CH" sz="900" dirty="0">
-              <a:latin typeface="Courier New" panose="02070309020205020404" pitchFamily="49" charset="0"/>
-              <a:cs typeface="Courier New" panose="02070309020205020404" pitchFamily="49" charset="0"/>
-            </a:endParaRPr>
-          </a:p>
-        </p:txBody>
-      </p:sp>
-      <p:pic>
-        <p:nvPicPr>
-          <p:cNvPr id="11" name="Picture 10">
-            <a:extLst>
-              <a:ext uri="{FF2B5EF4-FFF2-40B4-BE49-F238E27FC236}">
-                <a16:creationId xmlns:a16="http://schemas.microsoft.com/office/drawing/2014/main" id="{2783CD85-2370-4B6F-8A9B-320AD2145B2C}"/>
-              </a:ext>
-            </a:extLst>
-          </p:cNvPr>
-          <p:cNvPicPr>
-            <a:picLocks noChangeAspect="1"/>
-          </p:cNvPicPr>
-          <p:nvPr/>
-        </p:nvPicPr>
-        <p:blipFill>
-          <a:blip r:embed="rId2"/>
-          <a:stretch>
-            <a:fillRect/>
-          </a:stretch>
-        </p:blipFill>
-        <p:spPr>
-          <a:xfrm>
-            <a:off x="6301240" y="1909718"/>
-            <a:ext cx="5151283" cy="4365610"/>
-          </a:xfrm>
-          <a:prstGeom prst="rect">
-            <a:avLst/>
-          </a:prstGeom>
-        </p:spPr>
-      </p:pic>
-      <p:sp>
-        <p:nvSpPr>
-          <p:cNvPr id="13" name="TextBox 12">
-            <a:extLst>
-              <a:ext uri="{FF2B5EF4-FFF2-40B4-BE49-F238E27FC236}">
-                <a16:creationId xmlns:a16="http://schemas.microsoft.com/office/drawing/2014/main" id="{44B47329-9839-2DEC-DE8C-0F080223DF18}"/>
-              </a:ext>
-            </a:extLst>
-          </p:cNvPr>
-          <p:cNvSpPr txBox="1"/>
-          <p:nvPr/>
-        </p:nvSpPr>
-        <p:spPr>
-          <a:xfrm>
-            <a:off x="838200" y="1909718"/>
-            <a:ext cx="4632556" cy="1034129"/>
-          </a:xfrm>
-          <a:prstGeom prst="rect">
-            <a:avLst/>
-          </a:prstGeom>
-          <a:noFill/>
-        </p:spPr>
-        <p:txBody>
-          <a:bodyPr wrap="square">
-            <a:spAutoFit/>
-          </a:bodyPr>
-          <a:lstStyle/>
-          <a:p>
-            <a:pPr marL="228600" indent="-228600">
-              <a:lnSpc>
-                <a:spcPct val="90000"/>
-              </a:lnSpc>
-              <a:spcBef>
-                <a:spcPts val="1000"/>
-              </a:spcBef>
-              <a:buFont typeface="Arial" panose="020B0604020202020204" pitchFamily="34" charset="0"/>
-              <a:buChar char="•"/>
-            </a:pPr>
-            <a:r>
-              <a:rPr lang="en-US" sz="1700" dirty="0"/>
-              <a:t>Based clarifications with Paul Aitken (IE doctor) and Amanda Baber (IANA), the best approach is to mirror the PTI registry from ITU-T G.984.3 as a IPFIX </a:t>
-            </a:r>
-            <a:r>
-              <a:rPr lang="en-US" sz="1700" dirty="0" err="1"/>
-              <a:t>Subregistry</a:t>
-            </a:r>
-            <a:r>
-              <a:rPr lang="en-US" sz="1700" dirty="0"/>
-              <a:t>.</a:t>
-            </a:r>
-          </a:p>
-        </p:txBody>
-      </p:sp>
-    </p:spTree>
-    <p:extLst>
-      <p:ext uri="{BB962C8B-B14F-4D97-AF65-F5344CB8AC3E}">
-        <p14:creationId xmlns:p14="http://schemas.microsoft.com/office/powerpoint/2010/main" val="3900353875"/>
-      </p:ext>
-    </p:extLst>
-  </p:cSld>
-  <p:clrMapOvr>
-    <a:masterClrMapping/>
-  </p:clrMapOvr>
-</p:sld>
-</file>
-
-<file path=ppt/slides/slide7.xml><?xml version="1.0" encoding="utf-8"?>
-<p:sld xmlns:a="http://schemas.openxmlformats.org/drawingml/2006/main" xmlns:r="http://schemas.openxmlformats.org/officeDocument/2006/relationships" xmlns:p="http://schemas.openxmlformats.org/presentationml/2006/main">
-  <p:cSld>
-    <p:spTree>
-      <p:nvGrpSpPr>
-        <p:cNvPr id="1" name=""/>
-        <p:cNvGrpSpPr/>
-        <p:nvPr/>
-      </p:nvGrpSpPr>
-      <p:grpSpPr>
-        <a:xfrm>
-          <a:off x="0" y="0"/>
-          <a:ext cx="0" cy="0"/>
-          <a:chOff x="0" y="0"/>
-          <a:chExt cx="0" cy="0"/>
-        </a:xfrm>
-      </p:grpSpPr>
-      <p:sp>
-        <p:nvSpPr>
-          <p:cNvPr id="2" name="Title 1">
-            <a:extLst>
-              <a:ext uri="{FF2B5EF4-FFF2-40B4-BE49-F238E27FC236}">
-                <a16:creationId xmlns:a16="http://schemas.microsoft.com/office/drawing/2014/main" id="{FF20F271-6F0D-4AC0-BB1D-F5C338165C13}"/>
-              </a:ext>
-            </a:extLst>
-          </p:cNvPr>
-          <p:cNvSpPr>
-            <a:spLocks noGrp="1"/>
-          </p:cNvSpPr>
-          <p:nvPr>
-            <p:ph type="title"/>
-          </p:nvPr>
-        </p:nvSpPr>
-        <p:spPr/>
-        <p:txBody>
-          <a:bodyPr>
-            <a:normAutofit/>
-          </a:bodyPr>
-          <a:lstStyle/>
-          <a:p>
-            <a:r>
-              <a:rPr lang="en-US" sz="3600" b="1" dirty="0"/>
-              <a:t>Export of GPON Encapsulation Mode in IPFIX</a:t>
-            </a:r>
-            <a:br>
-              <a:rPr lang="en-US" sz="3600" dirty="0"/>
-            </a:br>
-            <a:r>
-              <a:rPr lang="en-US" sz="3600" dirty="0">
-                <a:solidFill>
-                  <a:schemeClr val="bg2">
-                    <a:lumMod val="75000"/>
-                  </a:schemeClr>
-                </a:solidFill>
-              </a:rPr>
-              <a:t>Sample Use Case</a:t>
-            </a:r>
-          </a:p>
-        </p:txBody>
-      </p:sp>
-      <p:sp>
-        <p:nvSpPr>
-          <p:cNvPr id="3" name="Content Placeholder 2">
-            <a:extLst>
-              <a:ext uri="{FF2B5EF4-FFF2-40B4-BE49-F238E27FC236}">
-                <a16:creationId xmlns:a16="http://schemas.microsoft.com/office/drawing/2014/main" id="{29C0DFD4-432D-4B0C-93DF-790441DCF5B9}"/>
-              </a:ext>
-            </a:extLst>
-          </p:cNvPr>
-          <p:cNvSpPr>
-            <a:spLocks noGrp="1"/>
-          </p:cNvSpPr>
-          <p:nvPr>
-            <p:ph idx="1"/>
-          </p:nvPr>
-        </p:nvSpPr>
-        <p:spPr>
-          <a:xfrm>
-            <a:off x="838198" y="1825624"/>
-            <a:ext cx="5709252" cy="4782565"/>
-          </a:xfrm>
-        </p:spPr>
-        <p:txBody>
-          <a:bodyPr>
-            <a:noAutofit/>
-          </a:bodyPr>
-          <a:lstStyle/>
-          <a:p>
-            <a:pPr marL="0" lvl="1" indent="0">
-              <a:spcBef>
-                <a:spcPts val="1200"/>
-              </a:spcBef>
-              <a:buNone/>
-            </a:pPr>
-            <a:r>
-              <a:rPr lang="en-US" sz="1700" dirty="0"/>
-              <a:t>GEM Port-ID is usually mapped to IEEE 802.1Q into VLAN identifier (VID) and Priority code point (PCP, IEEE 802.1p class of service) which is used for Network Slicing related use cases. Differentiate between different application and their Quality-of-Service properties.</a:t>
-            </a:r>
-          </a:p>
-          <a:p>
-            <a:pPr marL="0" lvl="1" indent="0">
-              <a:spcBef>
-                <a:spcPts val="1200"/>
-              </a:spcBef>
-              <a:buNone/>
-            </a:pPr>
-            <a:r>
-              <a:rPr lang="en-US" sz="1700" dirty="0"/>
-              <a:t>The IPFIX IEs </a:t>
-            </a:r>
-            <a:r>
-              <a:rPr lang="en-US" sz="1700" b="1" dirty="0" err="1">
-                <a:solidFill>
-                  <a:srgbClr val="FF0000"/>
-                </a:solidFill>
-              </a:rPr>
-              <a:t>gponGemPti</a:t>
-            </a:r>
-            <a:r>
-              <a:rPr lang="en-US" sz="1700" b="1" dirty="0">
-                <a:solidFill>
-                  <a:srgbClr val="FF0000"/>
-                </a:solidFill>
-              </a:rPr>
-              <a:t> (TBD1) or </a:t>
-            </a:r>
-            <a:r>
-              <a:rPr lang="en-US" sz="1700" b="1" dirty="0" err="1">
-                <a:solidFill>
-                  <a:srgbClr val="FF0000"/>
-                </a:solidFill>
-              </a:rPr>
-              <a:t>gponGemPortId</a:t>
-            </a:r>
-            <a:r>
-              <a:rPr lang="en-US" sz="1700" b="1" dirty="0">
-                <a:solidFill>
-                  <a:srgbClr val="FF0000"/>
-                </a:solidFill>
-              </a:rPr>
-              <a:t> (TBD2), </a:t>
-            </a:r>
-            <a:r>
-              <a:rPr lang="en-US" sz="1700" dirty="0" err="1"/>
-              <a:t>sourceMacAddress</a:t>
-            </a:r>
-            <a:r>
-              <a:rPr lang="en-US" sz="1700" dirty="0"/>
-              <a:t> (56), </a:t>
-            </a:r>
-            <a:r>
-              <a:rPr lang="en-US" sz="1700" dirty="0" err="1"/>
-              <a:t>destinationMacAddress</a:t>
-            </a:r>
-            <a:r>
-              <a:rPr lang="en-US" sz="1700" dirty="0"/>
-              <a:t> (80), </a:t>
-            </a:r>
-            <a:r>
-              <a:rPr lang="en-US" sz="1700" dirty="0" err="1"/>
-              <a:t>ingressInterface</a:t>
-            </a:r>
-            <a:r>
-              <a:rPr lang="en-US" sz="1700" dirty="0"/>
-              <a:t> (10), </a:t>
-            </a:r>
-            <a:r>
-              <a:rPr lang="en-US" sz="1700" dirty="0" err="1"/>
-              <a:t>egressInterface</a:t>
-            </a:r>
-            <a:r>
-              <a:rPr lang="en-US" sz="1700" dirty="0"/>
-              <a:t> (14) and </a:t>
-            </a:r>
-            <a:r>
-              <a:rPr lang="en-US" sz="1700" dirty="0" err="1"/>
-              <a:t>forwardingStatus</a:t>
-            </a:r>
-            <a:r>
-              <a:rPr lang="en-US" sz="1700" dirty="0"/>
-              <a:t> (89)[RFC5102] [RFC7270] [IANA-IPFIX], and some existing counter information's [IANA-IPFIX] providing answers to the following questions (amongst others):</a:t>
-            </a:r>
-          </a:p>
-          <a:p>
-            <a:pPr marL="228600" lvl="1">
-              <a:spcBef>
-                <a:spcPts val="1200"/>
-              </a:spcBef>
-            </a:pPr>
-            <a:r>
-              <a:rPr lang="en-US" sz="1700" b="1" dirty="0">
-                <a:solidFill>
-                  <a:srgbClr val="FF0000"/>
-                </a:solidFill>
-              </a:rPr>
-              <a:t>How many user or OAM frames are forwarded or dropped to which ONU on which egress interface and GEM Port-ID?</a:t>
-            </a:r>
-          </a:p>
-          <a:p>
-            <a:pPr marL="228600" lvl="1">
-              <a:spcBef>
-                <a:spcPts val="1200"/>
-              </a:spcBef>
-            </a:pPr>
-            <a:r>
-              <a:rPr lang="en-US" sz="1700" b="1" dirty="0">
-                <a:solidFill>
-                  <a:srgbClr val="FF0000"/>
-                </a:solidFill>
-              </a:rPr>
-              <a:t>If dropped, for which reasons?</a:t>
-            </a:r>
-          </a:p>
-          <a:p>
-            <a:pPr marL="0" lvl="1" indent="0">
-              <a:spcBef>
-                <a:spcPts val="1200"/>
-              </a:spcBef>
-              <a:buNone/>
-            </a:pPr>
-            <a:r>
-              <a:rPr lang="en-US" sz="1700" dirty="0"/>
-              <a:t>The received ONU frames on an OLT are mapped and forwarded depending on GEM Port-ID to a dot1qVlanId (243) and dot1qPriority (244) upstream to the provider network.</a:t>
-            </a:r>
-            <a:endParaRPr lang="en-US" sz="1500" dirty="0"/>
-          </a:p>
-        </p:txBody>
-      </p:sp>
-      <p:sp>
-        <p:nvSpPr>
-          <p:cNvPr id="16" name="Slide Number Placeholder 1">
-            <a:extLst>
-              <a:ext uri="{FF2B5EF4-FFF2-40B4-BE49-F238E27FC236}">
-                <a16:creationId xmlns:a16="http://schemas.microsoft.com/office/drawing/2014/main" id="{4D0044F8-1C12-4A59-883A-7B56B9370029}"/>
-              </a:ext>
-            </a:extLst>
-          </p:cNvPr>
-          <p:cNvSpPr>
-            <a:spLocks noGrp="1"/>
-          </p:cNvSpPr>
-          <p:nvPr>
-            <p:ph type="sldNum" sz="quarter" idx="12"/>
-          </p:nvPr>
-        </p:nvSpPr>
-        <p:spPr>
-          <a:xfrm>
-            <a:off x="11607800" y="6362700"/>
-            <a:ext cx="414338" cy="365125"/>
-          </a:xfrm>
-        </p:spPr>
-        <p:txBody>
-          <a:bodyPr/>
-          <a:lstStyle/>
-          <a:p>
-            <a:fld id="{FC4AC485-25DE-431E-B345-9C0A15BB7F8A}" type="slidenum">
-              <a:rPr lang="en-US" sz="2200" smtClean="0"/>
-              <a:t>7</a:t>
-            </a:fld>
-            <a:endParaRPr lang="en-US" sz="2200"/>
-          </a:p>
-        </p:txBody>
-      </p:sp>
-      <p:cxnSp>
-        <p:nvCxnSpPr>
-          <p:cNvPr id="19" name="Straight Connector 18">
-            <a:extLst>
-              <a:ext uri="{FF2B5EF4-FFF2-40B4-BE49-F238E27FC236}">
-                <a16:creationId xmlns:a16="http://schemas.microsoft.com/office/drawing/2014/main" id="{0B6C1BDC-BF55-FD94-3484-544EA92C7FB5}"/>
-              </a:ext>
-            </a:extLst>
-          </p:cNvPr>
-          <p:cNvCxnSpPr>
-            <a:cxnSpLocks/>
-          </p:cNvCxnSpPr>
-          <p:nvPr/>
-        </p:nvCxnSpPr>
-        <p:spPr>
-          <a:xfrm>
-            <a:off x="7700474" y="3828069"/>
-            <a:ext cx="4112490" cy="0"/>
-          </a:xfrm>
-          <a:prstGeom prst="line">
-            <a:avLst/>
-          </a:prstGeom>
-          <a:ln>
-            <a:solidFill>
-              <a:srgbClr val="FF0000"/>
-            </a:solidFill>
-          </a:ln>
-        </p:spPr>
-        <p:style>
-          <a:lnRef idx="1">
-            <a:schemeClr val="accent1"/>
-          </a:lnRef>
-          <a:fillRef idx="0">
-            <a:schemeClr val="accent1"/>
-          </a:fillRef>
-          <a:effectRef idx="0">
-            <a:schemeClr val="accent1"/>
-          </a:effectRef>
-          <a:fontRef idx="minor">
-            <a:schemeClr val="tx1"/>
-          </a:fontRef>
-        </p:style>
-      </p:cxnSp>
-      <p:cxnSp>
-        <p:nvCxnSpPr>
-          <p:cNvPr id="21" name="Straight Connector 20">
-            <a:extLst>
-              <a:ext uri="{FF2B5EF4-FFF2-40B4-BE49-F238E27FC236}">
-                <a16:creationId xmlns:a16="http://schemas.microsoft.com/office/drawing/2014/main" id="{C792BE71-AAC5-1168-374B-7F35875A049B}"/>
-              </a:ext>
-            </a:extLst>
-          </p:cNvPr>
-          <p:cNvCxnSpPr>
-            <a:cxnSpLocks/>
-            <a:stCxn id="9" idx="3"/>
-          </p:cNvCxnSpPr>
-          <p:nvPr/>
-        </p:nvCxnSpPr>
-        <p:spPr>
-          <a:xfrm>
-            <a:off x="7675755" y="4037882"/>
-            <a:ext cx="4137209" cy="0"/>
-          </a:xfrm>
-          <a:prstGeom prst="line">
-            <a:avLst/>
-          </a:prstGeom>
-          <a:ln>
-            <a:solidFill>
-              <a:schemeClr val="accent6"/>
-            </a:solidFill>
-          </a:ln>
-        </p:spPr>
-        <p:style>
-          <a:lnRef idx="1">
-            <a:schemeClr val="accent1"/>
-          </a:lnRef>
-          <a:fillRef idx="0">
-            <a:schemeClr val="accent1"/>
-          </a:fillRef>
-          <a:effectRef idx="0">
-            <a:schemeClr val="accent1"/>
-          </a:effectRef>
-          <a:fontRef idx="minor">
-            <a:schemeClr val="tx1"/>
-          </a:fontRef>
-        </p:style>
-      </p:cxnSp>
-      <p:cxnSp>
-        <p:nvCxnSpPr>
-          <p:cNvPr id="23" name="Straight Connector 22">
-            <a:extLst>
-              <a:ext uri="{FF2B5EF4-FFF2-40B4-BE49-F238E27FC236}">
-                <a16:creationId xmlns:a16="http://schemas.microsoft.com/office/drawing/2014/main" id="{4479FBDF-8446-7072-DA6E-FC8E137CD86C}"/>
-              </a:ext>
-            </a:extLst>
-          </p:cNvPr>
-          <p:cNvCxnSpPr>
-            <a:cxnSpLocks/>
-          </p:cNvCxnSpPr>
-          <p:nvPr/>
-        </p:nvCxnSpPr>
-        <p:spPr>
-          <a:xfrm>
-            <a:off x="7566660" y="4299647"/>
-            <a:ext cx="4246304" cy="0"/>
-          </a:xfrm>
-          <a:prstGeom prst="line">
-            <a:avLst/>
-          </a:prstGeom>
-          <a:ln>
-            <a:solidFill>
-              <a:schemeClr val="accent2"/>
-            </a:solidFill>
-          </a:ln>
-        </p:spPr>
-        <p:style>
-          <a:lnRef idx="1">
-            <a:schemeClr val="accent1"/>
-          </a:lnRef>
-          <a:fillRef idx="0">
-            <a:schemeClr val="accent1"/>
-          </a:fillRef>
-          <a:effectRef idx="0">
-            <a:schemeClr val="accent1"/>
-          </a:effectRef>
-          <a:fontRef idx="minor">
-            <a:schemeClr val="tx1"/>
-          </a:fontRef>
-        </p:style>
-      </p:cxnSp>
-      <p:sp>
-        <p:nvSpPr>
-          <p:cNvPr id="24" name="TextBox 23">
-            <a:extLst>
-              <a:ext uri="{FF2B5EF4-FFF2-40B4-BE49-F238E27FC236}">
-                <a16:creationId xmlns:a16="http://schemas.microsoft.com/office/drawing/2014/main" id="{C45FB0E6-08A6-088E-2645-75A513DBCEE6}"/>
-              </a:ext>
-            </a:extLst>
-          </p:cNvPr>
-          <p:cNvSpPr txBox="1"/>
-          <p:nvPr/>
-        </p:nvSpPr>
-        <p:spPr>
-          <a:xfrm>
-            <a:off x="11028245" y="3645093"/>
-            <a:ext cx="889987" cy="230832"/>
-          </a:xfrm>
-          <a:prstGeom prst="rect">
-            <a:avLst/>
-          </a:prstGeom>
-          <a:noFill/>
-        </p:spPr>
-        <p:txBody>
-          <a:bodyPr wrap="none" rtlCol="0">
-            <a:spAutoFit/>
-          </a:bodyPr>
-          <a:lstStyle/>
-          <a:p>
-            <a:r>
-              <a:rPr lang="de-CH" sz="900" dirty="0"/>
-              <a:t>VLAN 100, CS 1</a:t>
-            </a:r>
-          </a:p>
-        </p:txBody>
-      </p:sp>
-      <p:sp>
-        <p:nvSpPr>
-          <p:cNvPr id="25" name="TextBox 24">
-            <a:extLst>
-              <a:ext uri="{FF2B5EF4-FFF2-40B4-BE49-F238E27FC236}">
-                <a16:creationId xmlns:a16="http://schemas.microsoft.com/office/drawing/2014/main" id="{76CA7950-70CB-4B6F-B13D-BD4052D70E8B}"/>
-              </a:ext>
-            </a:extLst>
-          </p:cNvPr>
-          <p:cNvSpPr txBox="1"/>
-          <p:nvPr/>
-        </p:nvSpPr>
-        <p:spPr>
-          <a:xfrm>
-            <a:off x="11032580" y="3872163"/>
-            <a:ext cx="889987" cy="230832"/>
-          </a:xfrm>
-          <a:prstGeom prst="rect">
-            <a:avLst/>
-          </a:prstGeom>
-          <a:noFill/>
-        </p:spPr>
-        <p:txBody>
-          <a:bodyPr wrap="none" rtlCol="0">
-            <a:spAutoFit/>
-          </a:bodyPr>
-          <a:lstStyle/>
-          <a:p>
-            <a:r>
-              <a:rPr lang="de-CH" sz="900" dirty="0"/>
-              <a:t>VLAN 101, CS 1</a:t>
-            </a:r>
-          </a:p>
-        </p:txBody>
-      </p:sp>
-      <p:sp>
-        <p:nvSpPr>
-          <p:cNvPr id="26" name="TextBox 25">
-            <a:extLst>
-              <a:ext uri="{FF2B5EF4-FFF2-40B4-BE49-F238E27FC236}">
-                <a16:creationId xmlns:a16="http://schemas.microsoft.com/office/drawing/2014/main" id="{F228A7F4-8E8A-1627-6EC1-87491FC5DC8E}"/>
-              </a:ext>
-            </a:extLst>
-          </p:cNvPr>
-          <p:cNvSpPr txBox="1"/>
-          <p:nvPr/>
-        </p:nvSpPr>
-        <p:spPr>
-          <a:xfrm>
-            <a:off x="11004124" y="4135991"/>
-            <a:ext cx="915635" cy="230832"/>
-          </a:xfrm>
-          <a:prstGeom prst="rect">
-            <a:avLst/>
-          </a:prstGeom>
-          <a:noFill/>
-        </p:spPr>
-        <p:txBody>
-          <a:bodyPr wrap="none" rtlCol="0">
-            <a:spAutoFit/>
-          </a:bodyPr>
-          <a:lstStyle/>
-          <a:p>
-            <a:r>
-              <a:rPr lang="de-CH" sz="900" dirty="0"/>
-              <a:t>VLAN  200, CS 5</a:t>
-            </a:r>
-          </a:p>
-        </p:txBody>
-      </p:sp>
-      <p:sp>
-        <p:nvSpPr>
-          <p:cNvPr id="11" name="Rectangle 10">
-            <a:extLst>
-              <a:ext uri="{FF2B5EF4-FFF2-40B4-BE49-F238E27FC236}">
-                <a16:creationId xmlns:a16="http://schemas.microsoft.com/office/drawing/2014/main" id="{FD8FD905-6814-71DF-C26C-564E6ACE7501}"/>
-              </a:ext>
-            </a:extLst>
-          </p:cNvPr>
-          <p:cNvSpPr/>
-          <p:nvPr/>
-        </p:nvSpPr>
-        <p:spPr>
-          <a:xfrm>
-            <a:off x="10052658" y="3656163"/>
-            <a:ext cx="823519" cy="763438"/>
-          </a:xfrm>
-          <a:prstGeom prst="rect">
-            <a:avLst/>
-          </a:prstGeom>
-          <a:solidFill>
-            <a:schemeClr val="bg1"/>
-          </a:solidFill>
-        </p:spPr>
-        <p:style>
-          <a:lnRef idx="2">
-            <a:schemeClr val="accent1">
-              <a:shade val="15000"/>
-            </a:schemeClr>
-          </a:lnRef>
-          <a:fillRef idx="1">
-            <a:schemeClr val="accent1"/>
-          </a:fillRef>
-          <a:effectRef idx="0">
-            <a:schemeClr val="accent1"/>
-          </a:effectRef>
-          <a:fontRef idx="minor">
-            <a:schemeClr val="lt1"/>
-          </a:fontRef>
-        </p:style>
-        <p:txBody>
-          <a:bodyPr rtlCol="0" anchor="ctr"/>
-          <a:lstStyle/>
-          <a:p>
-            <a:pPr algn="ctr"/>
-            <a:r>
-              <a:rPr lang="de-CH" sz="1400" dirty="0">
-                <a:solidFill>
-                  <a:schemeClr val="tx1"/>
-                </a:solidFill>
-              </a:rPr>
-              <a:t>OLT</a:t>
-            </a:r>
-          </a:p>
-        </p:txBody>
-      </p:sp>
-      <p:sp>
-        <p:nvSpPr>
-          <p:cNvPr id="31" name="TextBox 30">
-            <a:extLst>
-              <a:ext uri="{FF2B5EF4-FFF2-40B4-BE49-F238E27FC236}">
-                <a16:creationId xmlns:a16="http://schemas.microsoft.com/office/drawing/2014/main" id="{7CB75CF9-1EAE-7B19-DDBB-C058C1E78F6D}"/>
-              </a:ext>
-            </a:extLst>
-          </p:cNvPr>
-          <p:cNvSpPr txBox="1"/>
-          <p:nvPr/>
-        </p:nvSpPr>
-        <p:spPr>
-          <a:xfrm>
-            <a:off x="7630312" y="3646662"/>
-            <a:ext cx="1027845" cy="230832"/>
-          </a:xfrm>
-          <a:prstGeom prst="rect">
-            <a:avLst/>
-          </a:prstGeom>
-          <a:noFill/>
-        </p:spPr>
-        <p:txBody>
-          <a:bodyPr wrap="none" rtlCol="0">
-            <a:spAutoFit/>
-          </a:bodyPr>
-          <a:lstStyle/>
-          <a:p>
-            <a:r>
-              <a:rPr lang="de-CH" sz="900" dirty="0"/>
-              <a:t>GEM-Port ID 1001</a:t>
-            </a:r>
-          </a:p>
-        </p:txBody>
-      </p:sp>
-      <p:sp>
-        <p:nvSpPr>
-          <p:cNvPr id="32" name="TextBox 31">
-            <a:extLst>
-              <a:ext uri="{FF2B5EF4-FFF2-40B4-BE49-F238E27FC236}">
-                <a16:creationId xmlns:a16="http://schemas.microsoft.com/office/drawing/2014/main" id="{2A43C6C6-419F-21B9-E538-33380D55507D}"/>
-              </a:ext>
-            </a:extLst>
-          </p:cNvPr>
-          <p:cNvSpPr txBox="1"/>
-          <p:nvPr/>
-        </p:nvSpPr>
-        <p:spPr>
-          <a:xfrm>
-            <a:off x="7630313" y="3871455"/>
-            <a:ext cx="1027845" cy="230832"/>
-          </a:xfrm>
-          <a:prstGeom prst="rect">
-            <a:avLst/>
-          </a:prstGeom>
-          <a:noFill/>
-        </p:spPr>
-        <p:txBody>
-          <a:bodyPr wrap="none" rtlCol="0">
-            <a:spAutoFit/>
-          </a:bodyPr>
-          <a:lstStyle/>
-          <a:p>
-            <a:r>
-              <a:rPr lang="de-CH" sz="900" dirty="0"/>
-              <a:t>GEM-Port ID 1011</a:t>
-            </a:r>
-          </a:p>
-        </p:txBody>
-      </p:sp>
-      <p:sp>
-        <p:nvSpPr>
-          <p:cNvPr id="33" name="TextBox 32">
-            <a:extLst>
-              <a:ext uri="{FF2B5EF4-FFF2-40B4-BE49-F238E27FC236}">
-                <a16:creationId xmlns:a16="http://schemas.microsoft.com/office/drawing/2014/main" id="{DFBE6543-AFFF-7768-7C3E-9FB383035122}"/>
-              </a:ext>
-            </a:extLst>
-          </p:cNvPr>
-          <p:cNvSpPr txBox="1"/>
-          <p:nvPr/>
-        </p:nvSpPr>
-        <p:spPr>
-          <a:xfrm>
-            <a:off x="7623526" y="4137560"/>
-            <a:ext cx="1027845" cy="230832"/>
-          </a:xfrm>
-          <a:prstGeom prst="rect">
-            <a:avLst/>
-          </a:prstGeom>
-          <a:noFill/>
-        </p:spPr>
-        <p:txBody>
-          <a:bodyPr wrap="none" rtlCol="0">
-            <a:spAutoFit/>
-          </a:bodyPr>
-          <a:lstStyle/>
-          <a:p>
-            <a:r>
-              <a:rPr lang="de-CH" sz="900" dirty="0"/>
-              <a:t>GEM-Port ID 2005</a:t>
-            </a:r>
-          </a:p>
-        </p:txBody>
-      </p:sp>
-      <p:sp>
-        <p:nvSpPr>
-          <p:cNvPr id="37" name="Rectangle 36">
-            <a:extLst>
-              <a:ext uri="{FF2B5EF4-FFF2-40B4-BE49-F238E27FC236}">
-                <a16:creationId xmlns:a16="http://schemas.microsoft.com/office/drawing/2014/main" id="{07A01298-597C-8941-698F-29B11C245E6F}"/>
-              </a:ext>
-            </a:extLst>
-          </p:cNvPr>
-          <p:cNvSpPr/>
-          <p:nvPr/>
-        </p:nvSpPr>
-        <p:spPr>
-          <a:xfrm>
-            <a:off x="6797905" y="2724674"/>
-            <a:ext cx="883337" cy="763438"/>
-          </a:xfrm>
-          <a:prstGeom prst="rect">
-            <a:avLst/>
-          </a:prstGeom>
-          <a:solidFill>
-            <a:schemeClr val="bg1"/>
-          </a:solidFill>
-        </p:spPr>
-        <p:style>
-          <a:lnRef idx="2">
-            <a:schemeClr val="accent1">
-              <a:shade val="15000"/>
-            </a:schemeClr>
-          </a:lnRef>
-          <a:fillRef idx="1">
-            <a:schemeClr val="accent1"/>
-          </a:fillRef>
-          <a:effectRef idx="0">
-            <a:schemeClr val="accent1"/>
-          </a:effectRef>
-          <a:fontRef idx="minor">
-            <a:schemeClr val="lt1"/>
-          </a:fontRef>
-        </p:style>
-        <p:txBody>
-          <a:bodyPr rtlCol="0" anchor="ctr"/>
-          <a:lstStyle/>
-          <a:p>
-            <a:pPr algn="ctr"/>
-            <a:r>
-              <a:rPr lang="de-CH" sz="1400" dirty="0">
-                <a:solidFill>
-                  <a:schemeClr val="tx1"/>
-                </a:solidFill>
-              </a:rPr>
-              <a:t>ONU</a:t>
-            </a:r>
-            <a:br>
-              <a:rPr lang="de-CH" sz="1400" dirty="0">
-                <a:solidFill>
-                  <a:schemeClr val="tx1"/>
-                </a:solidFill>
-              </a:rPr>
-            </a:br>
-            <a:r>
-              <a:rPr lang="de-CH" sz="1400" dirty="0">
-                <a:solidFill>
-                  <a:schemeClr val="tx1"/>
-                </a:solidFill>
-              </a:rPr>
-              <a:t>ONT</a:t>
-            </a:r>
-          </a:p>
-        </p:txBody>
-      </p:sp>
-      <p:cxnSp>
-        <p:nvCxnSpPr>
-          <p:cNvPr id="39" name="Straight Connector 38">
-            <a:extLst>
-              <a:ext uri="{FF2B5EF4-FFF2-40B4-BE49-F238E27FC236}">
-                <a16:creationId xmlns:a16="http://schemas.microsoft.com/office/drawing/2014/main" id="{364CDF00-911E-5967-3FD8-98472C4DAB0F}"/>
-              </a:ext>
-            </a:extLst>
-          </p:cNvPr>
-          <p:cNvCxnSpPr>
-            <a:cxnSpLocks/>
-          </p:cNvCxnSpPr>
-          <p:nvPr/>
-        </p:nvCxnSpPr>
-        <p:spPr>
-          <a:xfrm>
-            <a:off x="7700474" y="2893512"/>
-            <a:ext cx="1307697" cy="0"/>
-          </a:xfrm>
-          <a:prstGeom prst="line">
-            <a:avLst/>
-          </a:prstGeom>
-          <a:ln>
-            <a:solidFill>
-              <a:srgbClr val="FF0000"/>
-            </a:solidFill>
-          </a:ln>
-        </p:spPr>
-        <p:style>
-          <a:lnRef idx="1">
-            <a:schemeClr val="accent1"/>
-          </a:lnRef>
-          <a:fillRef idx="0">
-            <a:schemeClr val="accent1"/>
-          </a:fillRef>
-          <a:effectRef idx="0">
-            <a:schemeClr val="accent1"/>
-          </a:effectRef>
-          <a:fontRef idx="minor">
-            <a:schemeClr val="tx1"/>
-          </a:fontRef>
-        </p:style>
-      </p:cxnSp>
-      <p:cxnSp>
-        <p:nvCxnSpPr>
-          <p:cNvPr id="40" name="Straight Connector 39">
-            <a:extLst>
-              <a:ext uri="{FF2B5EF4-FFF2-40B4-BE49-F238E27FC236}">
-                <a16:creationId xmlns:a16="http://schemas.microsoft.com/office/drawing/2014/main" id="{1D78E238-7C5C-22A9-C498-FAA42AE9BC44}"/>
-              </a:ext>
-            </a:extLst>
-          </p:cNvPr>
-          <p:cNvCxnSpPr>
-            <a:cxnSpLocks/>
-          </p:cNvCxnSpPr>
-          <p:nvPr/>
-        </p:nvCxnSpPr>
-        <p:spPr>
-          <a:xfrm>
-            <a:off x="7700474" y="3103325"/>
-            <a:ext cx="1326844" cy="1"/>
-          </a:xfrm>
-          <a:prstGeom prst="line">
-            <a:avLst/>
-          </a:prstGeom>
-          <a:ln>
-            <a:solidFill>
-              <a:schemeClr val="accent6"/>
-            </a:solidFill>
-          </a:ln>
-        </p:spPr>
-        <p:style>
-          <a:lnRef idx="1">
-            <a:schemeClr val="accent1"/>
-          </a:lnRef>
-          <a:fillRef idx="0">
-            <a:schemeClr val="accent1"/>
-          </a:fillRef>
-          <a:effectRef idx="0">
-            <a:schemeClr val="accent1"/>
-          </a:effectRef>
-          <a:fontRef idx="minor">
-            <a:schemeClr val="tx1"/>
-          </a:fontRef>
-        </p:style>
-      </p:cxnSp>
-      <p:cxnSp>
-        <p:nvCxnSpPr>
-          <p:cNvPr id="41" name="Straight Connector 40">
-            <a:extLst>
-              <a:ext uri="{FF2B5EF4-FFF2-40B4-BE49-F238E27FC236}">
-                <a16:creationId xmlns:a16="http://schemas.microsoft.com/office/drawing/2014/main" id="{4B226300-35A8-1E07-69F5-0F9C7D2F8B45}"/>
-              </a:ext>
-            </a:extLst>
-          </p:cNvPr>
-          <p:cNvCxnSpPr>
-            <a:cxnSpLocks/>
-          </p:cNvCxnSpPr>
-          <p:nvPr/>
-        </p:nvCxnSpPr>
-        <p:spPr>
-          <a:xfrm>
-            <a:off x="7700474" y="3365090"/>
-            <a:ext cx="1307697" cy="0"/>
-          </a:xfrm>
-          <a:prstGeom prst="line">
-            <a:avLst/>
-          </a:prstGeom>
-          <a:ln>
-            <a:solidFill>
-              <a:schemeClr val="accent2"/>
-            </a:solidFill>
-          </a:ln>
-        </p:spPr>
-        <p:style>
-          <a:lnRef idx="1">
-            <a:schemeClr val="accent1"/>
-          </a:lnRef>
-          <a:fillRef idx="0">
-            <a:schemeClr val="accent1"/>
-          </a:fillRef>
-          <a:effectRef idx="0">
-            <a:schemeClr val="accent1"/>
-          </a:effectRef>
-          <a:fontRef idx="minor">
-            <a:schemeClr val="tx1"/>
-          </a:fontRef>
-        </p:style>
-      </p:cxnSp>
-      <p:sp>
-        <p:nvSpPr>
-          <p:cNvPr id="45" name="TextBox 44">
-            <a:extLst>
-              <a:ext uri="{FF2B5EF4-FFF2-40B4-BE49-F238E27FC236}">
-                <a16:creationId xmlns:a16="http://schemas.microsoft.com/office/drawing/2014/main" id="{BE50662C-4ECB-1CBF-A129-1215E0243525}"/>
-              </a:ext>
-            </a:extLst>
-          </p:cNvPr>
-          <p:cNvSpPr txBox="1"/>
-          <p:nvPr/>
-        </p:nvSpPr>
-        <p:spPr>
-          <a:xfrm>
-            <a:off x="7655031" y="2712105"/>
-            <a:ext cx="1027845" cy="230832"/>
-          </a:xfrm>
-          <a:prstGeom prst="rect">
-            <a:avLst/>
-          </a:prstGeom>
-          <a:noFill/>
-        </p:spPr>
-        <p:txBody>
-          <a:bodyPr wrap="none" rtlCol="0">
-            <a:spAutoFit/>
-          </a:bodyPr>
-          <a:lstStyle/>
-          <a:p>
-            <a:r>
-              <a:rPr lang="de-CH" sz="900" dirty="0"/>
-              <a:t>GEM-Port ID 1001</a:t>
-            </a:r>
-          </a:p>
-        </p:txBody>
-      </p:sp>
-      <p:sp>
-        <p:nvSpPr>
-          <p:cNvPr id="46" name="TextBox 45">
-            <a:extLst>
-              <a:ext uri="{FF2B5EF4-FFF2-40B4-BE49-F238E27FC236}">
-                <a16:creationId xmlns:a16="http://schemas.microsoft.com/office/drawing/2014/main" id="{A49DD977-50EC-CE84-8956-0362DE5472A3}"/>
-              </a:ext>
-            </a:extLst>
-          </p:cNvPr>
-          <p:cNvSpPr txBox="1"/>
-          <p:nvPr/>
-        </p:nvSpPr>
-        <p:spPr>
-          <a:xfrm>
-            <a:off x="7655032" y="2936898"/>
-            <a:ext cx="1027845" cy="230832"/>
-          </a:xfrm>
-          <a:prstGeom prst="rect">
-            <a:avLst/>
-          </a:prstGeom>
-          <a:noFill/>
-        </p:spPr>
-        <p:txBody>
-          <a:bodyPr wrap="none" rtlCol="0">
-            <a:spAutoFit/>
-          </a:bodyPr>
-          <a:lstStyle/>
-          <a:p>
-            <a:r>
-              <a:rPr lang="de-CH" sz="900" dirty="0"/>
-              <a:t>GEM-Port ID 1011</a:t>
-            </a:r>
-          </a:p>
-        </p:txBody>
-      </p:sp>
-      <p:sp>
-        <p:nvSpPr>
-          <p:cNvPr id="47" name="TextBox 46">
-            <a:extLst>
-              <a:ext uri="{FF2B5EF4-FFF2-40B4-BE49-F238E27FC236}">
-                <a16:creationId xmlns:a16="http://schemas.microsoft.com/office/drawing/2014/main" id="{E1136BE3-83A0-FEBC-AD94-9E08BE134C65}"/>
-              </a:ext>
-            </a:extLst>
-          </p:cNvPr>
-          <p:cNvSpPr txBox="1"/>
-          <p:nvPr/>
-        </p:nvSpPr>
-        <p:spPr>
-          <a:xfrm>
-            <a:off x="7648245" y="3203003"/>
-            <a:ext cx="1027845" cy="230832"/>
-          </a:xfrm>
-          <a:prstGeom prst="rect">
-            <a:avLst/>
-          </a:prstGeom>
-          <a:noFill/>
-        </p:spPr>
-        <p:txBody>
-          <a:bodyPr wrap="none" rtlCol="0">
-            <a:spAutoFit/>
-          </a:bodyPr>
-          <a:lstStyle/>
-          <a:p>
-            <a:r>
-              <a:rPr lang="de-CH" sz="900" dirty="0"/>
-              <a:t>GEM-Port ID 2005</a:t>
-            </a:r>
-          </a:p>
-        </p:txBody>
-      </p:sp>
-      <p:cxnSp>
-        <p:nvCxnSpPr>
-          <p:cNvPr id="53" name="Straight Connector 52">
-            <a:extLst>
-              <a:ext uri="{FF2B5EF4-FFF2-40B4-BE49-F238E27FC236}">
-                <a16:creationId xmlns:a16="http://schemas.microsoft.com/office/drawing/2014/main" id="{720E8FAA-3801-D461-9499-AFF7E7992C86}"/>
-              </a:ext>
-            </a:extLst>
-          </p:cNvPr>
-          <p:cNvCxnSpPr>
-            <a:cxnSpLocks/>
-          </p:cNvCxnSpPr>
-          <p:nvPr/>
-        </p:nvCxnSpPr>
-        <p:spPr>
-          <a:xfrm>
-            <a:off x="7688114" y="4826678"/>
-            <a:ext cx="1320057" cy="0"/>
-          </a:xfrm>
-          <a:prstGeom prst="line">
-            <a:avLst/>
-          </a:prstGeom>
-          <a:ln>
-            <a:solidFill>
-              <a:srgbClr val="FF0000"/>
-            </a:solidFill>
-          </a:ln>
-        </p:spPr>
-        <p:style>
-          <a:lnRef idx="1">
-            <a:schemeClr val="accent1"/>
-          </a:lnRef>
-          <a:fillRef idx="0">
-            <a:schemeClr val="accent1"/>
-          </a:fillRef>
-          <a:effectRef idx="0">
-            <a:schemeClr val="accent1"/>
-          </a:effectRef>
-          <a:fontRef idx="minor">
-            <a:schemeClr val="tx1"/>
-          </a:fontRef>
-        </p:style>
-      </p:cxnSp>
-      <p:cxnSp>
-        <p:nvCxnSpPr>
-          <p:cNvPr id="54" name="Straight Connector 53">
-            <a:extLst>
-              <a:ext uri="{FF2B5EF4-FFF2-40B4-BE49-F238E27FC236}">
-                <a16:creationId xmlns:a16="http://schemas.microsoft.com/office/drawing/2014/main" id="{4E653942-AB38-35AE-F37D-4C7356658CD3}"/>
-              </a:ext>
-            </a:extLst>
-          </p:cNvPr>
-          <p:cNvCxnSpPr>
-            <a:cxnSpLocks/>
-          </p:cNvCxnSpPr>
-          <p:nvPr/>
-        </p:nvCxnSpPr>
-        <p:spPr>
-          <a:xfrm>
-            <a:off x="7688114" y="5036491"/>
-            <a:ext cx="1314484" cy="1"/>
-          </a:xfrm>
-          <a:prstGeom prst="line">
-            <a:avLst/>
-          </a:prstGeom>
-          <a:ln>
-            <a:solidFill>
-              <a:schemeClr val="accent6"/>
-            </a:solidFill>
-          </a:ln>
-        </p:spPr>
-        <p:style>
-          <a:lnRef idx="1">
-            <a:schemeClr val="accent1"/>
-          </a:lnRef>
-          <a:fillRef idx="0">
-            <a:schemeClr val="accent1"/>
-          </a:fillRef>
-          <a:effectRef idx="0">
-            <a:schemeClr val="accent1"/>
-          </a:effectRef>
-          <a:fontRef idx="minor">
-            <a:schemeClr val="tx1"/>
-          </a:fontRef>
-        </p:style>
-      </p:cxnSp>
-      <p:cxnSp>
-        <p:nvCxnSpPr>
-          <p:cNvPr id="55" name="Straight Connector 54">
-            <a:extLst>
-              <a:ext uri="{FF2B5EF4-FFF2-40B4-BE49-F238E27FC236}">
-                <a16:creationId xmlns:a16="http://schemas.microsoft.com/office/drawing/2014/main" id="{361FA3A2-9F92-DE6F-87D9-B13078E45135}"/>
-              </a:ext>
-            </a:extLst>
-          </p:cNvPr>
-          <p:cNvCxnSpPr>
-            <a:cxnSpLocks/>
-          </p:cNvCxnSpPr>
-          <p:nvPr/>
-        </p:nvCxnSpPr>
-        <p:spPr>
-          <a:xfrm>
-            <a:off x="7623526" y="5298255"/>
-            <a:ext cx="1379504" cy="0"/>
-          </a:xfrm>
-          <a:prstGeom prst="line">
-            <a:avLst/>
-          </a:prstGeom>
-          <a:ln>
-            <a:solidFill>
-              <a:schemeClr val="accent2"/>
-            </a:solidFill>
-          </a:ln>
-        </p:spPr>
-        <p:style>
-          <a:lnRef idx="1">
-            <a:schemeClr val="accent1"/>
-          </a:lnRef>
-          <a:fillRef idx="0">
-            <a:schemeClr val="accent1"/>
-          </a:fillRef>
-          <a:effectRef idx="0">
-            <a:schemeClr val="accent1"/>
-          </a:effectRef>
-          <a:fontRef idx="minor">
-            <a:schemeClr val="tx1"/>
-          </a:fontRef>
-        </p:style>
-      </p:cxnSp>
-      <p:sp>
-        <p:nvSpPr>
-          <p:cNvPr id="56" name="TextBox 55">
-            <a:extLst>
-              <a:ext uri="{FF2B5EF4-FFF2-40B4-BE49-F238E27FC236}">
-                <a16:creationId xmlns:a16="http://schemas.microsoft.com/office/drawing/2014/main" id="{1DDBE4C7-7021-9E09-A924-6AF22D47345F}"/>
-              </a:ext>
-            </a:extLst>
-          </p:cNvPr>
-          <p:cNvSpPr txBox="1"/>
-          <p:nvPr/>
-        </p:nvSpPr>
-        <p:spPr>
-          <a:xfrm>
-            <a:off x="7642671" y="4645271"/>
-            <a:ext cx="1027845" cy="230832"/>
-          </a:xfrm>
-          <a:prstGeom prst="rect">
-            <a:avLst/>
-          </a:prstGeom>
-          <a:noFill/>
-        </p:spPr>
-        <p:txBody>
-          <a:bodyPr wrap="none" rtlCol="0">
-            <a:spAutoFit/>
-          </a:bodyPr>
-          <a:lstStyle/>
-          <a:p>
-            <a:r>
-              <a:rPr lang="de-CH" sz="900" dirty="0"/>
-              <a:t>GEM-Port ID 1001</a:t>
-            </a:r>
-          </a:p>
-        </p:txBody>
-      </p:sp>
-      <p:sp>
-        <p:nvSpPr>
-          <p:cNvPr id="57" name="TextBox 56">
-            <a:extLst>
-              <a:ext uri="{FF2B5EF4-FFF2-40B4-BE49-F238E27FC236}">
-                <a16:creationId xmlns:a16="http://schemas.microsoft.com/office/drawing/2014/main" id="{FD726CB4-0545-996F-5E91-995E2E3D7223}"/>
-              </a:ext>
-            </a:extLst>
-          </p:cNvPr>
-          <p:cNvSpPr txBox="1"/>
-          <p:nvPr/>
-        </p:nvSpPr>
-        <p:spPr>
-          <a:xfrm>
-            <a:off x="7642672" y="4870064"/>
-            <a:ext cx="1027845" cy="230832"/>
-          </a:xfrm>
-          <a:prstGeom prst="rect">
-            <a:avLst/>
-          </a:prstGeom>
-          <a:noFill/>
-        </p:spPr>
-        <p:txBody>
-          <a:bodyPr wrap="none" rtlCol="0">
-            <a:spAutoFit/>
-          </a:bodyPr>
-          <a:lstStyle/>
-          <a:p>
-            <a:r>
-              <a:rPr lang="de-CH" sz="900" dirty="0"/>
-              <a:t>GEM-Port ID 1011</a:t>
-            </a:r>
-          </a:p>
-        </p:txBody>
-      </p:sp>
-      <p:sp>
-        <p:nvSpPr>
-          <p:cNvPr id="58" name="TextBox 57">
-            <a:extLst>
-              <a:ext uri="{FF2B5EF4-FFF2-40B4-BE49-F238E27FC236}">
-                <a16:creationId xmlns:a16="http://schemas.microsoft.com/office/drawing/2014/main" id="{975AAFEB-6AE9-31BF-2FD5-C6E97ADECEB0}"/>
-              </a:ext>
-            </a:extLst>
-          </p:cNvPr>
-          <p:cNvSpPr txBox="1"/>
-          <p:nvPr/>
-        </p:nvSpPr>
-        <p:spPr>
-          <a:xfrm>
-            <a:off x="7635885" y="5136169"/>
-            <a:ext cx="1027845" cy="230832"/>
-          </a:xfrm>
-          <a:prstGeom prst="rect">
-            <a:avLst/>
-          </a:prstGeom>
-          <a:noFill/>
-        </p:spPr>
-        <p:txBody>
-          <a:bodyPr wrap="none" rtlCol="0">
-            <a:spAutoFit/>
-          </a:bodyPr>
-          <a:lstStyle/>
-          <a:p>
-            <a:r>
-              <a:rPr lang="de-CH" sz="900" dirty="0"/>
-              <a:t>GEM-Port ID 2005</a:t>
-            </a:r>
-          </a:p>
-        </p:txBody>
-      </p:sp>
-      <p:sp>
-        <p:nvSpPr>
-          <p:cNvPr id="13" name="Isosceles Triangle 12">
-            <a:extLst>
-              <a:ext uri="{FF2B5EF4-FFF2-40B4-BE49-F238E27FC236}">
-                <a16:creationId xmlns:a16="http://schemas.microsoft.com/office/drawing/2014/main" id="{6166E6C8-C8D5-5851-4503-FEB59CA61488}"/>
-              </a:ext>
-            </a:extLst>
-          </p:cNvPr>
-          <p:cNvSpPr/>
-          <p:nvPr/>
-        </p:nvSpPr>
-        <p:spPr>
-          <a:xfrm rot="5400000">
-            <a:off x="8062028" y="3670818"/>
-            <a:ext cx="2655725" cy="763438"/>
-          </a:xfrm>
-          <a:prstGeom prst="triangle">
-            <a:avLst/>
-          </a:prstGeom>
-          <a:solidFill>
-            <a:schemeClr val="bg1"/>
-          </a:solidFill>
-        </p:spPr>
-        <p:style>
-          <a:lnRef idx="2">
-            <a:schemeClr val="accent1">
-              <a:shade val="15000"/>
-            </a:schemeClr>
-          </a:lnRef>
-          <a:fillRef idx="1">
-            <a:schemeClr val="accent1"/>
-          </a:fillRef>
-          <a:effectRef idx="0">
-            <a:schemeClr val="accent1"/>
-          </a:effectRef>
-          <a:fontRef idx="minor">
-            <a:schemeClr val="lt1"/>
-          </a:fontRef>
-        </p:style>
-        <p:txBody>
-          <a:bodyPr rtlCol="0" anchor="ctr"/>
-          <a:lstStyle/>
-          <a:p>
-            <a:pPr algn="ctr"/>
-            <a:endParaRPr lang="de-CH" dirty="0"/>
-          </a:p>
-        </p:txBody>
-      </p:sp>
-      <p:sp>
-        <p:nvSpPr>
-          <p:cNvPr id="36" name="Rectangle 35">
-            <a:extLst>
-              <a:ext uri="{FF2B5EF4-FFF2-40B4-BE49-F238E27FC236}">
-                <a16:creationId xmlns:a16="http://schemas.microsoft.com/office/drawing/2014/main" id="{68833096-395E-EAE2-7818-CF98CF32594E}"/>
-              </a:ext>
-            </a:extLst>
-          </p:cNvPr>
-          <p:cNvSpPr/>
-          <p:nvPr/>
-        </p:nvSpPr>
-        <p:spPr>
-          <a:xfrm>
-            <a:off x="6792417" y="4616961"/>
-            <a:ext cx="883338" cy="763438"/>
-          </a:xfrm>
-          <a:prstGeom prst="rect">
-            <a:avLst/>
-          </a:prstGeom>
-          <a:solidFill>
-            <a:schemeClr val="bg1"/>
-          </a:solidFill>
-        </p:spPr>
-        <p:style>
-          <a:lnRef idx="2">
-            <a:schemeClr val="accent1">
-              <a:shade val="15000"/>
-            </a:schemeClr>
-          </a:lnRef>
-          <a:fillRef idx="1">
-            <a:schemeClr val="accent1"/>
-          </a:fillRef>
-          <a:effectRef idx="0">
-            <a:schemeClr val="accent1"/>
-          </a:effectRef>
-          <a:fontRef idx="minor">
-            <a:schemeClr val="lt1"/>
-          </a:fontRef>
-        </p:style>
-        <p:txBody>
-          <a:bodyPr rtlCol="0" anchor="ctr"/>
-          <a:lstStyle/>
-          <a:p>
-            <a:pPr algn="ctr"/>
-            <a:r>
-              <a:rPr lang="de-CH" sz="1400" dirty="0">
-                <a:solidFill>
-                  <a:schemeClr val="tx1"/>
-                </a:solidFill>
-              </a:rPr>
-              <a:t>ONU</a:t>
-            </a:r>
-            <a:br>
-              <a:rPr lang="de-CH" sz="1400" dirty="0">
-                <a:solidFill>
-                  <a:schemeClr val="tx1"/>
-                </a:solidFill>
-              </a:rPr>
-            </a:br>
-            <a:r>
-              <a:rPr lang="de-CH" sz="1400" dirty="0">
-                <a:solidFill>
-                  <a:schemeClr val="tx1"/>
-                </a:solidFill>
-              </a:rPr>
-              <a:t>ONT</a:t>
-            </a:r>
-          </a:p>
-        </p:txBody>
-      </p:sp>
-      <p:sp>
-        <p:nvSpPr>
-          <p:cNvPr id="9" name="Rectangle 8">
-            <a:extLst>
-              <a:ext uri="{FF2B5EF4-FFF2-40B4-BE49-F238E27FC236}">
-                <a16:creationId xmlns:a16="http://schemas.microsoft.com/office/drawing/2014/main" id="{CB8CF3E6-098E-512C-468C-CBBD11195727}"/>
-              </a:ext>
-            </a:extLst>
-          </p:cNvPr>
-          <p:cNvSpPr/>
-          <p:nvPr/>
-        </p:nvSpPr>
-        <p:spPr>
-          <a:xfrm>
-            <a:off x="6792417" y="3656163"/>
-            <a:ext cx="883338" cy="763438"/>
-          </a:xfrm>
-          <a:prstGeom prst="rect">
-            <a:avLst/>
-          </a:prstGeom>
-          <a:solidFill>
-            <a:schemeClr val="bg1"/>
-          </a:solidFill>
-        </p:spPr>
-        <p:style>
-          <a:lnRef idx="2">
-            <a:schemeClr val="accent1">
-              <a:shade val="15000"/>
-            </a:schemeClr>
-          </a:lnRef>
-          <a:fillRef idx="1">
-            <a:schemeClr val="accent1"/>
-          </a:fillRef>
-          <a:effectRef idx="0">
-            <a:schemeClr val="accent1"/>
-          </a:effectRef>
-          <a:fontRef idx="minor">
-            <a:schemeClr val="lt1"/>
-          </a:fontRef>
-        </p:style>
-        <p:txBody>
-          <a:bodyPr rtlCol="0" anchor="ctr"/>
-          <a:lstStyle/>
-          <a:p>
-            <a:pPr algn="ctr"/>
-            <a:r>
-              <a:rPr lang="de-CH" sz="1400" dirty="0">
-                <a:solidFill>
-                  <a:schemeClr val="tx1"/>
-                </a:solidFill>
-              </a:rPr>
-              <a:t>ONU</a:t>
-            </a:r>
-            <a:br>
-              <a:rPr lang="de-CH" sz="1400" dirty="0">
-                <a:solidFill>
-                  <a:schemeClr val="tx1"/>
-                </a:solidFill>
-              </a:rPr>
-            </a:br>
-            <a:r>
-              <a:rPr lang="de-CH" sz="1400" dirty="0">
-                <a:solidFill>
-                  <a:schemeClr val="tx1"/>
-                </a:solidFill>
-              </a:rPr>
-              <a:t>ONT</a:t>
-            </a:r>
-          </a:p>
-        </p:txBody>
-      </p:sp>
-      <p:sp>
-        <p:nvSpPr>
-          <p:cNvPr id="87" name="TextBox 86">
-            <a:extLst>
-              <a:ext uri="{FF2B5EF4-FFF2-40B4-BE49-F238E27FC236}">
-                <a16:creationId xmlns:a16="http://schemas.microsoft.com/office/drawing/2014/main" id="{47D624F8-7EFD-B0B4-F0B5-EBD21B6EEBE8}"/>
-              </a:ext>
-            </a:extLst>
-          </p:cNvPr>
-          <p:cNvSpPr txBox="1"/>
-          <p:nvPr/>
-        </p:nvSpPr>
-        <p:spPr>
-          <a:xfrm>
-            <a:off x="9001384" y="3770374"/>
-            <a:ext cx="713978" cy="523220"/>
-          </a:xfrm>
-          <a:prstGeom prst="rect">
-            <a:avLst/>
-          </a:prstGeom>
-          <a:noFill/>
-        </p:spPr>
-        <p:txBody>
-          <a:bodyPr wrap="none" rtlCol="0">
-            <a:spAutoFit/>
-          </a:bodyPr>
-          <a:lstStyle/>
-          <a:p>
-            <a:r>
-              <a:rPr lang="de-CH" sz="1400" dirty="0"/>
-              <a:t>Optical</a:t>
-            </a:r>
-            <a:br>
-              <a:rPr lang="de-CH" sz="1400" dirty="0"/>
-            </a:br>
-            <a:r>
-              <a:rPr lang="de-CH" sz="1400" dirty="0"/>
-              <a:t>Splitter</a:t>
-            </a:r>
-          </a:p>
-        </p:txBody>
-      </p:sp>
-    </p:spTree>
-    <p:extLst>
-      <p:ext uri="{BB962C8B-B14F-4D97-AF65-F5344CB8AC3E}">
-        <p14:creationId xmlns:p14="http://schemas.microsoft.com/office/powerpoint/2010/main" val="3255145719"/>
-      </p:ext>
-    </p:extLst>
-  </p:cSld>
-  <p:clrMapOvr>
-    <a:masterClrMapping/>
-  </p:clrMapOvr>
-</p:sld>
-</file>
-
-<file path=ppt/slides/slide8.xml><?xml version="1.0" encoding="utf-8"?>
-<p:sld xmlns:a="http://schemas.openxmlformats.org/drawingml/2006/main" xmlns:r="http://schemas.openxmlformats.org/officeDocument/2006/relationships" xmlns:p="http://schemas.openxmlformats.org/presentationml/2006/main">
-  <p:cSld>
-    <p:spTree>
-      <p:nvGrpSpPr>
-        <p:cNvPr id="1" name=""/>
-        <p:cNvGrpSpPr/>
-        <p:nvPr/>
-      </p:nvGrpSpPr>
-      <p:grpSpPr>
-        <a:xfrm>
-          <a:off x="0" y="0"/>
-          <a:ext cx="0" cy="0"/>
-          <a:chOff x="0" y="0"/>
-          <a:chExt cx="0" cy="0"/>
-        </a:xfrm>
-      </p:grpSpPr>
-      <p:sp>
-        <p:nvSpPr>
-          <p:cNvPr id="2" name="Title 1">
-            <a:extLst>
-              <a:ext uri="{FF2B5EF4-FFF2-40B4-BE49-F238E27FC236}">
-                <a16:creationId xmlns:a16="http://schemas.microsoft.com/office/drawing/2014/main" id="{FF20F271-6F0D-4AC0-BB1D-F5C338165C13}"/>
-              </a:ext>
-            </a:extLst>
-          </p:cNvPr>
-          <p:cNvSpPr>
-            <a:spLocks noGrp="1"/>
-          </p:cNvSpPr>
-          <p:nvPr>
-            <p:ph type="title"/>
-          </p:nvPr>
-        </p:nvSpPr>
-        <p:spPr/>
-        <p:txBody>
-          <a:bodyPr>
-            <a:normAutofit/>
-          </a:bodyPr>
-          <a:lstStyle/>
-          <a:p>
-            <a:r>
-              <a:rPr lang="en-US" sz="3600" b="1" dirty="0"/>
-              <a:t>Export of GPON Encapsulation Mode in IPFIX</a:t>
-            </a:r>
-            <a:br>
               <a:rPr lang="en-US" sz="3600" dirty="0"/>
             </a:br>
             <a:r>
@@ -8563,7 +6039,7 @@
           <a:p>
             <a:fld id="{FC4AC485-25DE-431E-B345-9C0A15BB7F8A}" type="slidenum">
               <a:rPr lang="en-US" sz="2200" smtClean="0"/>
-              <a:t>8</a:t>
+              <a:t>5</a:t>
             </a:fld>
             <a:endParaRPr lang="en-US" sz="2200" dirty="0"/>
           </a:p>
@@ -8807,10 +6283,10 @@
               <a:buNone/>
             </a:pPr>
             <a:r>
-              <a:rPr lang="de-CH" sz="3800" dirty="0">
+              <a:rPr lang="de-CH" sz="3800">
                 <a:latin typeface="+mj-lt"/>
               </a:rPr>
-              <a:t>14. </a:t>
+              <a:t>15. </a:t>
             </a:r>
             <a:r>
               <a:rPr lang="de-CH" sz="3800" dirty="0" err="1">
